--- a/reports/presentacion/ASL_resultados.pptx
+++ b/reports/presentacion/ASL_resultados.pptx
@@ -5506,7 +5506,7 @@
                 <a:ea typeface="Arial"/>
                 <a:cs typeface="Arial"/>
               </a:rPr>
-              <a:t>Pendiente externo: pesos finales de M2/M3 y métricas finales de test.</a:t>
+              <a:t>Límites: los espacios (27 % de error en M1) y M3 sin converger en 15 épocas.</a:t>
             </a:r>
           </a:p>
         </p:txBody>
@@ -5572,7 +5572,7 @@
                 <a:ea typeface="Arial"/>
                 <a:cs typeface="Arial"/>
               </a:rPr>
-              <a:t>La app queda preparada para integrar los tres modelos.</a:t>
+              <a:t>Siguiente: aumento de datos y modelo de lenguaje.</a:t>
             </a:r>
           </a:p>
         </p:txBody>
@@ -7411,7 +7411,7 @@
                 <a:ea typeface="Arial"/>
                 <a:cs typeface="Arial"/>
               </a:rPr>
-              <a:t>Disponible para la demo: M1.</a:t>
+              <a:t>Disponibles en la demo: M1, M2 y M3.</a:t>
             </a:r>
           </a:p>
           <a:p xmlns:a="http://schemas.openxmlformats.org/drawingml/2006/main">
@@ -7434,7 +7434,7 @@
                 <a:ea typeface="Arial"/>
                 <a:cs typeface="Arial"/>
               </a:rPr>
-              <a:t>M2 y M3 se activan al incorporar sus checkpoints finales.</a:t>
+              <a:t>Mejor en prueba: M1. Más eficiente: M2.</a:t>
             </a:r>
           </a:p>
         </p:txBody>
@@ -7529,7 +7529,7 @@
                 <a:ea typeface="Arial"/>
                 <a:cs typeface="Arial"/>
               </a:rPr>
-              <a:t>Resultados disponibles de BiGRU</a:t>
+              <a:t>Resultados en prueba: M1 BiGRU es el mejor</a:t>
             </a:r>
           </a:p>
         </p:txBody>
@@ -7727,7 +7727,7 @@
                 <a:ea typeface="Arial"/>
                 <a:cs typeface="Arial"/>
               </a:rPr>
-              <a:t>0,2435</a:t>
+              <a:t>0,217</a:t>
             </a:r>
           </a:p>
         </p:txBody>
@@ -7793,7 +7793,7 @@
                 <a:ea typeface="Arial"/>
                 <a:cs typeface="Arial"/>
               </a:rPr>
-              <a:t>Distancia de edición normalizada</a:t>
+              <a:t>Distancia de edición normalizada · M1</a:t>
             </a:r>
           </a:p>
         </p:txBody>
@@ -7859,7 +7859,7 @@
                 <a:ea typeface="Arial"/>
                 <a:cs typeface="Arial"/>
               </a:rPr>
-              <a:t>CER  0,2425</a:t>
+              <a:t>CER  0,216</a:t>
             </a:r>
           </a:p>
           <a:p xmlns:a="http://schemas.openxmlformats.org/drawingml/2006/main">
@@ -7882,7 +7882,7 @@
                 <a:ea typeface="Arial"/>
                 <a:cs typeface="Arial"/>
               </a:rPr>
-              <a:t>Frase exacta  13,12 %</a:t>
+              <a:t>Frase exacta  10,9 %</a:t>
             </a:r>
           </a:p>
           <a:p xmlns:a="http://schemas.openxmlformats.org/drawingml/2006/main">
@@ -7905,7 +7905,7 @@
                 <a:ea typeface="Arial"/>
                 <a:cs typeface="Arial"/>
               </a:rPr>
-              <a:t>473 405 parámetros</a:t>
+              <a:t>1,67 M parámetros</a:t>
             </a:r>
           </a:p>
         </p:txBody>
@@ -7971,7 +7971,7 @@
                 <a:ea typeface="Arial"/>
                 <a:cs typeface="Arial"/>
               </a:rPr>
-              <a:t>3 857 secuencias de validación · checkpoint de la época 8</a:t>
+              <a:t>4 181 frases de prueba · 10 participantes no vistos</a:t>
             </a:r>
           </a:p>
         </p:txBody>
@@ -8037,7 +8037,7 @@
                 <a:ea typeface="Arial"/>
                 <a:cs typeface="Arial"/>
               </a:rPr>
-              <a:t>La evaluación final en test aún no está registrada en los artefactos locales.</a:t>
+              <a:t>M2 TCN: 0,247 con la mitad del tiempo · M3 Transformer: 0,256, aún mejorando</a:t>
             </a:r>
           </a:p>
         </p:txBody>

--- a/reports/presentacion/ASL_resultados.pptx
+++ b/reports/presentacion/ASL_resultados.pptx
@@ -10,11 +10,15 @@
   <p:sldIdLst>
     <p:sldId xmlns:r="http://schemas.openxmlformats.org/officeDocument/2006/relationships" id="256" r:id="R6f5be0512de54a89"/>
     <p:sldId xmlns:r="http://schemas.openxmlformats.org/officeDocument/2006/relationships" id="257" r:id="Re7e6cfa628aa445a"/>
+    <p:sldId xmlns:ns0="http://schemas.openxmlformats.org/officeDocument/2006/relationships" id="268" ns0:id="rId18"/>
     <p:sldId xmlns:r="http://schemas.openxmlformats.org/officeDocument/2006/relationships" id="258" r:id="R64342c7cc16c45fb"/>
     <p:sldId xmlns:r="http://schemas.openxmlformats.org/officeDocument/2006/relationships" id="259" r:id="R7f4473f455994e10"/>
     <p:sldId xmlns:r="http://schemas.openxmlformats.org/officeDocument/2006/relationships" id="260" r:id="R74fd125bad1c4c8a"/>
+    <p:sldId xmlns:ns0="http://schemas.openxmlformats.org/officeDocument/2006/relationships" id="269" ns0:id="rId19"/>
     <p:sldId xmlns:r="http://schemas.openxmlformats.org/officeDocument/2006/relationships" id="261" r:id="R07ea4ad381194311"/>
+    <p:sldId xmlns:ns0="http://schemas.openxmlformats.org/officeDocument/2006/relationships" id="270" ns0:id="rId20"/>
     <p:sldId xmlns:r="http://schemas.openxmlformats.org/officeDocument/2006/relationships" id="262" r:id="R92fb3a88a3804479"/>
+    <p:sldId xmlns:ns0="http://schemas.openxmlformats.org/officeDocument/2006/relationships" id="271" ns0:id="rId21"/>
     <p:sldId xmlns:r="http://schemas.openxmlformats.org/officeDocument/2006/relationships" id="263" r:id="Rf00543037f154d2b"/>
     <p:sldId xmlns:r="http://schemas.openxmlformats.org/officeDocument/2006/relationships" id="264" r:id="Re78d874622154973"/>
     <p:sldId xmlns:r="http://schemas.openxmlformats.org/officeDocument/2006/relationships" id="265" r:id="Rb2288f38f9c142ac"/>
@@ -453,7 +457,7 @@
           <a:lstStyle xmlns:a="http://schemas.openxmlformats.org/drawingml/2006/main"/>
           <a:p xmlns:a="http://schemas.openxmlformats.org/drawingml/2006/main">
             <a:r>
-              <a:t>Presentación del proyecto y de la app local. Las cifras siguientes corresponden a los artefactos presentes en models/metrics.json y al corpus en data/train.csv. No representan una comparación final de las tres arquitecturas.</a:t>
+              <a:t>Presentación del proyecto y demostración de la app. Las cifras salen de models/metrics.json (evaluación en prueba de los tres modelos entrenados en Kaggle).</a:t>
             </a:r>
           </a:p>
         </p:txBody>
@@ -593,7 +597,7 @@
           <a:lstStyle xmlns:a="http://schemas.openxmlformats.org/drawingml/2006/main"/>
           <a:p xmlns:a="http://schemas.openxmlformats.org/drawingml/2006/main">
             <a:r>
-              <a:t>Fuente: app/views/rendimiento.py y reports/capturas/eficiencia.png. Mide inferencia y decodificación en CPU; excluye carga y limpieza, una llamada de calentamiento por modelo, promedio de las 30 muestras. Los 2.22 ms por secuencia de metrics.json son una referencia por lotes de otro entorno y no son directamente comparables con la latencia local.</a:t>
+              <a:t>Fuente: app/views/rendimiento.py. Comparación de los tres modelos en prueba desde metrics.json, gráficas que se ocultan y botón para medir latencia en esta CPU (no recalcula test).</a:t>
             </a:r>
           </a:p>
         </p:txBody>
@@ -663,7 +667,7 @@
           <a:lstStyle xmlns:a="http://schemas.openxmlformats.org/drawingml/2006/main"/>
           <a:p xmlns:a="http://schemas.openxmlformats.org/drawingml/2006/main">
             <a:r>
-              <a:t>Guion en reports/guion_demo.md. Video local de respaldo: reports/demo_app.mp4. Para la demostración: abrir app, seleccionar una muestra, reproducir, revisar error, explorar y medir CPU. La app reconoce deletreo de ASL y requiere landmarks; no extrae coordenadas desde video. M2/M3 y resultados de test siguen pendientes de sus artefactos finales.</a:t>
+              <a:t>Límites: espacios (27 % de error en M1, 45 % en M2 y M3), M3 sin converger en 15 épocas, búsqueda de hiperparámetros reducida por el presupuesto de GPU. Siguiente: aumento de datos, modelo de lenguaje y Conformer.</a:t>
             </a:r>
           </a:p>
         </p:txBody>
@@ -689,6 +693,286 @@
   </p:cSld>
   <p:clrMapOvr>
     <a:masterClrMapping xmlns:a="http://schemas.openxmlformats.org/drawingml/2006/main"/>
+  </p:clrMapOvr>
+</p:notes>
+</file>
+
+<file path=ppt/notesSlides/notesSlide13.xml><?xml version="1.0" encoding="utf-8"?>
+<p:notes xmlns:a="http://schemas.openxmlformats.org/drawingml/2006/main" xmlns:p="http://schemas.openxmlformats.org/presentationml/2006/main" xmlns:r="http://schemas.openxmlformats.org/officeDocument/2006/relationships">
+  <p:cSld>
+    <p:spTree>
+      <p:nvGrpSpPr>
+        <p:cNvPr id="1" name=""/>
+        <p:cNvGrpSpPr/>
+        <p:nvPr/>
+      </p:nvGrpSpPr>
+      <p:grpSpPr>
+        <a:xfrm>
+          <a:off x="0" y="0"/>
+          <a:ext cx="0" cy="0"/>
+          <a:chOff x="0" y="0"/>
+          <a:chExt cx="0" cy="0"/>
+        </a:xfrm>
+      </p:grpSpPr>
+      <p:sp>
+        <p:nvSpPr>
+          <p:cNvPr id="2" name="Slide Image Placeholder 1"/>
+          <p:cNvSpPr>
+            <a:spLocks noGrp="1"/>
+          </p:cNvSpPr>
+          <p:nvPr>
+            <p:ph type="sldImg" idx="2"/>
+          </p:nvPr>
+        </p:nvSpPr>
+        <p:spPr/>
+      </p:sp>
+      <p:sp>
+        <p:nvSpPr>
+          <p:cNvPr id="3" name="Notes Placeholder 2"/>
+          <p:cNvSpPr>
+            <a:spLocks noGrp="1"/>
+          </p:cNvSpPr>
+          <p:nvPr>
+            <p:ph type="body" idx="3" sz="quarter"/>
+          </p:nvPr>
+        </p:nvSpPr>
+        <p:spPr/>
+        <p:txBody>
+          <a:bodyPr/>
+          <a:lstStyle/>
+          <a:p>
+            <a:r>
+              <a:t>Fuente: informe, sección 6.1. Los seis objetivos específicos se cumplieron.</a:t>
+            </a:r>
+          </a:p>
+        </p:txBody>
+      </p:sp>
+      <p:sp>
+        <p:nvSpPr>
+          <p:cNvPr id="4" name="Slide Number Placeholder 3"/>
+          <p:cNvSpPr>
+            <a:spLocks noGrp="1"/>
+          </p:cNvSpPr>
+          <p:nvPr>
+            <p:ph type="sldNum" idx="5" sz="quarter"/>
+          </p:nvPr>
+        </p:nvSpPr>
+        <p:spPr/>
+      </p:sp>
+    </p:spTree>
+  </p:cSld>
+  <p:clrMapOvr>
+    <a:masterClrMapping/>
+  </p:clrMapOvr>
+</p:notes>
+</file>
+
+<file path=ppt/notesSlides/notesSlide14.xml><?xml version="1.0" encoding="utf-8"?>
+<p:notes xmlns:a="http://schemas.openxmlformats.org/drawingml/2006/main" xmlns:p="http://schemas.openxmlformats.org/presentationml/2006/main" xmlns:r="http://schemas.openxmlformats.org/officeDocument/2006/relationships">
+  <p:cSld>
+    <p:spTree>
+      <p:nvGrpSpPr>
+        <p:cNvPr id="1" name=""/>
+        <p:cNvGrpSpPr/>
+        <p:nvPr/>
+      </p:nvGrpSpPr>
+      <p:grpSpPr>
+        <a:xfrm>
+          <a:off x="0" y="0"/>
+          <a:ext cx="0" cy="0"/>
+          <a:chOff x="0" y="0"/>
+          <a:chExt cx="0" cy="0"/>
+        </a:xfrm>
+      </p:grpSpPr>
+      <p:sp>
+        <p:nvSpPr>
+          <p:cNvPr id="2" name="Slide Image Placeholder 1"/>
+          <p:cNvSpPr>
+            <a:spLocks noGrp="1"/>
+          </p:cNvSpPr>
+          <p:nvPr>
+            <p:ph type="sldImg" idx="2"/>
+          </p:nvPr>
+        </p:nvSpPr>
+        <p:spPr/>
+      </p:sp>
+      <p:sp>
+        <p:nvSpPr>
+          <p:cNvPr id="3" name="Notes Placeholder 2"/>
+          <p:cNvSpPr>
+            <a:spLocks noGrp="1"/>
+          </p:cNvSpPr>
+          <p:nvPr>
+            <p:ph type="body" idx="3" sz="quarter"/>
+          </p:nvPr>
+        </p:nvSpPr>
+        <p:spPr/>
+        <p:txBody>
+          <a:bodyPr/>
+          <a:lstStyle/>
+          <a:p>
+            <a:r>
+              <a:t>Fuente: models/search_results.csv y models/final_training.json. Búsqueda: 8 configuraciones, 3 épocas sobre 5 000 secuencias; se eligió la de menor distancia de edición en validación. En los tres ganó la versión con más capacidad.</a:t>
+            </a:r>
+          </a:p>
+        </p:txBody>
+      </p:sp>
+      <p:sp>
+        <p:nvSpPr>
+          <p:cNvPr id="4" name="Slide Number Placeholder 3"/>
+          <p:cNvSpPr>
+            <a:spLocks noGrp="1"/>
+          </p:cNvSpPr>
+          <p:nvPr>
+            <p:ph type="sldNum" idx="5" sz="quarter"/>
+          </p:nvPr>
+        </p:nvSpPr>
+        <p:spPr/>
+      </p:sp>
+    </p:spTree>
+  </p:cSld>
+  <p:clrMapOvr>
+    <a:masterClrMapping/>
+  </p:clrMapOvr>
+</p:notes>
+</file>
+
+<file path=ppt/notesSlides/notesSlide15.xml><?xml version="1.0" encoding="utf-8"?>
+<p:notes xmlns:a="http://schemas.openxmlformats.org/drawingml/2006/main" xmlns:p="http://schemas.openxmlformats.org/presentationml/2006/main" xmlns:r="http://schemas.openxmlformats.org/officeDocument/2006/relationships">
+  <p:cSld>
+    <p:spTree>
+      <p:nvGrpSpPr>
+        <p:cNvPr id="1" name=""/>
+        <p:cNvGrpSpPr/>
+        <p:nvPr/>
+      </p:nvGrpSpPr>
+      <p:grpSpPr>
+        <a:xfrm>
+          <a:off x="0" y="0"/>
+          <a:ext cx="0" cy="0"/>
+          <a:chOff x="0" y="0"/>
+          <a:chExt cx="0" cy="0"/>
+        </a:xfrm>
+      </p:grpSpPr>
+      <p:sp>
+        <p:nvSpPr>
+          <p:cNvPr id="2" name="Slide Image Placeholder 1"/>
+          <p:cNvSpPr>
+            <a:spLocks noGrp="1"/>
+          </p:cNvSpPr>
+          <p:nvPr>
+            <p:ph type="sldImg" idx="2"/>
+          </p:nvPr>
+        </p:nvSpPr>
+        <p:spPr/>
+      </p:sp>
+      <p:sp>
+        <p:nvSpPr>
+          <p:cNvPr id="3" name="Notes Placeholder 2"/>
+          <p:cNvSpPr>
+            <a:spLocks noGrp="1"/>
+          </p:cNvSpPr>
+          <p:nvPr>
+            <p:ph type="body" idx="3" sz="quarter"/>
+          </p:nvPr>
+        </p:nvSpPr>
+        <p:spPr/>
+        <p:txBody>
+          <a:bodyPr/>
+          <a:lstStyle/>
+          <a:p>
+            <a:r>
+              <a:t>Fuente: models/metrics.json (prueba) y final_training.json. ms por secuencia medidos por lotes en GPU. M3 seguía mejorando en la última época: no convergió con 15 épocas.</a:t>
+            </a:r>
+          </a:p>
+        </p:txBody>
+      </p:sp>
+      <p:sp>
+        <p:nvSpPr>
+          <p:cNvPr id="4" name="Slide Number Placeholder 3"/>
+          <p:cNvSpPr>
+            <a:spLocks noGrp="1"/>
+          </p:cNvSpPr>
+          <p:nvPr>
+            <p:ph type="sldNum" idx="5" sz="quarter"/>
+          </p:nvPr>
+        </p:nvSpPr>
+        <p:spPr/>
+      </p:sp>
+    </p:spTree>
+  </p:cSld>
+  <p:clrMapOvr>
+    <a:masterClrMapping/>
+  </p:clrMapOvr>
+</p:notes>
+</file>
+
+<file path=ppt/notesSlides/notesSlide16.xml><?xml version="1.0" encoding="utf-8"?>
+<p:notes xmlns:a="http://schemas.openxmlformats.org/drawingml/2006/main" xmlns:p="http://schemas.openxmlformats.org/presentationml/2006/main" xmlns:r="http://schemas.openxmlformats.org/officeDocument/2006/relationships">
+  <p:cSld>
+    <p:spTree>
+      <p:nvGrpSpPr>
+        <p:cNvPr id="1" name=""/>
+        <p:cNvGrpSpPr/>
+        <p:nvPr/>
+      </p:nvGrpSpPr>
+      <p:grpSpPr>
+        <a:xfrm>
+          <a:off x="0" y="0"/>
+          <a:ext cx="0" cy="0"/>
+          <a:chOff x="0" y="0"/>
+          <a:chExt cx="0" cy="0"/>
+        </a:xfrm>
+      </p:grpSpPr>
+      <p:sp>
+        <p:nvSpPr>
+          <p:cNvPr id="2" name="Slide Image Placeholder 1"/>
+          <p:cNvSpPr>
+            <a:spLocks noGrp="1"/>
+          </p:cNvSpPr>
+          <p:nvPr>
+            <p:ph type="sldImg" idx="2"/>
+          </p:nvPr>
+        </p:nvSpPr>
+        <p:spPr/>
+      </p:sp>
+      <p:sp>
+        <p:nvSpPr>
+          <p:cNvPr id="3" name="Notes Placeholder 2"/>
+          <p:cNvSpPr>
+            <a:spLocks noGrp="1"/>
+          </p:cNvSpPr>
+          <p:nvPr>
+            <p:ph type="body" idx="3" sz="quarter"/>
+          </p:nvPr>
+        </p:nvSpPr>
+        <p:spPr/>
+        <p:txBody>
+          <a:bodyPr/>
+          <a:lstStyle/>
+          <a:p>
+            <a:r>
+              <a:t>Fuente: informe, secciones 6.2 y 6.3. 0,217 significa que, en promedio, uno de cada cinco caracteres necesita corrección: sirve para demostrar el enfoque, no para uso diario sin revisión.</a:t>
+            </a:r>
+          </a:p>
+        </p:txBody>
+      </p:sp>
+      <p:sp>
+        <p:nvSpPr>
+          <p:cNvPr id="4" name="Slide Number Placeholder 3"/>
+          <p:cNvSpPr>
+            <a:spLocks noGrp="1"/>
+          </p:cNvSpPr>
+          <p:nvPr>
+            <p:ph type="sldNum" idx="5" sz="quarter"/>
+          </p:nvPr>
+        </p:nvSpPr>
+        <p:spPr/>
+      </p:sp>
+    </p:spTree>
+  </p:cSld>
+  <p:clrMapOvr>
+    <a:masterClrMapping/>
   </p:clrMapOvr>
 </p:notes>
 </file>
@@ -943,7 +1227,7 @@
           <a:lstStyle xmlns:a="http://schemas.openxmlformats.org/drawingml/2006/main"/>
           <a:p xmlns:a="http://schemas.openxmlformats.org/drawingml/2006/main">
             <a:r>
-              <a:t>Fuente: src/models.py. Las arquitecturas M2 y M3 están implementadas, pero al preparar esta entrega no existen pesos ni métricas finales para ellas en models/. No mostrar modelos inicializados al azar como resultados.</a:t>
+              <a:t>Fuente: src/models.py. Las tres arquitecturas comparten entrada (80 características), salida (60 símbolos con blank) y pérdida CTC; solo cambia el codificador temporal. Pesos finales en models/.</a:t>
             </a:r>
           </a:p>
         </p:txBody>
@@ -1013,7 +1297,7 @@
           <a:lstStyle xmlns:a="http://schemas.openxmlformats.org/drawingml/2006/main"/>
           <a:p xmlns:a="http://schemas.openxmlformats.org/drawingml/2006/main">
             <a:r>
-              <a:t>Fuente: models/metrics.json, entrada m1. Split val; 3857 secuencias; best_epoch=8. NED es promedio por frase, CER es distancia total entre caracteres totales. La validación sirve para selección del modelo y no sustituye test.</a:t>
+              <a:t>Fuente: models/metrics.json, split test, 4 181 frases de 10 participantes no vistos. NED es el promedio por frase; CER divide errores totales entre caracteres totales. Puntaje de la competencia 1 − CER = 0,784.</a:t>
             </a:r>
           </a:p>
         </p:txBody>
@@ -1083,7 +1367,7 @@
           <a:lstStyle xmlns:a="http://schemas.openxmlformats.org/drawingml/2006/main"/>
           <a:p xmlns:a="http://schemas.openxmlformats.org/drawingml/2006/main">
             <a:r>
-              <a:t>Fuente: models/metrics.json, by_character_type. Son omisiones y sustituciones entre referencias de la categoría; las inserciones se contabilizan aparte. El error por categoría no equivale al CER total.</a:t>
+              <a:t>Fuente: models/metrics.json, by_character_type en prueba. Son omisiones y sustituciones sobre los caracteres de referencia; las inserciones se cuentan aparte. Las letras son lo más frecuente y aun así fallan más que dígitos y símbolos. Los espacios no tienen seña propia.</a:t>
             </a:r>
           </a:p>
         </p:txBody>
@@ -1223,7 +1507,7 @@
           <a:lstStyle xmlns:a="http://schemas.openxmlformats.org/drawingml/2006/main"/>
           <a:p xmlns:a="http://schemas.openxmlformats.org/drawingml/2006/main">
             <a:r>
-              <a:t>Fuente: app/views/predecir.py y reports/capturas/predecir.png. Demo: secuencia 109-580-5359, resultado M1 109-580-5354; una sustitución, distancia 1/12=0.0833. La latencia es una medición de CPU que varía entre ejecuciones.</a:t>
+              <a:t>Fuente: app/views/predecir.py. Demo: secuencia 109-580-5359. M1 da 109-580-5355 (una sustitución), M2 omite el último dígito y M3 acierta. Es un ejemplo; en el total de prueba M1 es el mejor.</a:t>
             </a:r>
           </a:p>
         </p:txBody>
@@ -3692,7 +3976,15 @@
           <c:idx val="0"/>
           <c:order val="0"/>
           <c:tx>
-            <c:v>Error por categoría</c:v>
+            <c:strRef>
+              <c:f>Sheet1!$B$1</c:f>
+              <c:strCache>
+                <c:ptCount val="1"/>
+                <c:pt idx="0">
+                  <c:v>M1 BiGRU</c:v>
+                </c:pt>
+              </c:strCache>
+            </c:strRef>
           </c:tx>
           <c:spPr>
             <a:solidFill xmlns:a="http://schemas.openxmlformats.org/drawingml/2006/main">
@@ -3700,9 +3992,28 @@
             </a:solidFill>
           </c:spPr>
           <c:invertIfNegative val="0"/>
+          <c:dLbls>
+            <c:numFmt formatCode="0%" sourceLinked="0"/>
+            <c:txPr xmlns:a="http://schemas.openxmlformats.org/drawingml/2006/main">
+              <a:bodyPr/>
+              <a:lstStyle/>
+              <a:p>
+                <a:pPr>
+                  <a:defRPr sz="1200"/>
+                </a:pPr>
+              </a:p>
+            </c:txPr>
+            <c:showLegendKey val="0"/>
+            <c:showVal val="1"/>
+            <c:showCatName val="0"/>
+            <c:showSerName val="0"/>
+            <c:showPercent val="0"/>
+            <c:showBubbleSize val="0"/>
+            <c:showLeaderLines val="1"/>
+          </c:dLbls>
           <c:cat>
             <c:strRef>
-              <c:f>'Chart Data'!$A$2:$A$5</c:f>
+              <c:f>Sheet1!$A$2:$A$5</c:f>
               <c:strCache>
                 <c:ptCount val="4"/>
                 <c:pt idx="0">
@@ -3722,21 +4033,183 @@
           </c:cat>
           <c:val>
             <c:numRef>
-              <c:f>'Chart Data'!$B$2:$B$5</c:f>
+              <c:f>Sheet1!$B$2:$B$5</c:f>
               <c:numCache>
-                <c:formatCode>0%</c:formatCode>
+                <c:formatCode>0.0%</c:formatCode>
                 <c:ptCount val="4"/>
                 <c:pt idx="0">
-                  <c:v>0.236221</c:v>
+                  <c:v>0.194</c:v>
                 </c:pt>
                 <c:pt idx="1">
-                  <c:v>0.176918</c:v>
+                  <c:v>0.165</c:v>
                 </c:pt>
                 <c:pt idx="2">
-                  <c:v>0.228106</c:v>
+                  <c:v>0.178</c:v>
                 </c:pt>
                 <c:pt idx="3">
-                  <c:v>0.434862</c:v>
+                  <c:v>0.272</c:v>
+                </c:pt>
+              </c:numCache>
+            </c:numRef>
+          </c:val>
+        </c:ser>
+        <c:ser>
+          <c:idx val="1"/>
+          <c:order val="1"/>
+          <c:tx>
+            <c:strRef>
+              <c:f>Sheet1!$C$1</c:f>
+              <c:strCache>
+                <c:ptCount val="1"/>
+                <c:pt idx="0">
+                  <c:v>M2 TCN</c:v>
+                </c:pt>
+              </c:strCache>
+            </c:strRef>
+          </c:tx>
+          <c:spPr>
+            <a:solidFill xmlns:a="http://schemas.openxmlformats.org/drawingml/2006/main">
+              <a:srgbClr val="56B4E9"/>
+            </a:solidFill>
+          </c:spPr>
+          <c:invertIfNegative val="0"/>
+          <c:dLbls>
+            <c:numFmt formatCode="0%" sourceLinked="0"/>
+            <c:txPr xmlns:a="http://schemas.openxmlformats.org/drawingml/2006/main">
+              <a:bodyPr/>
+              <a:lstStyle/>
+              <a:p>
+                <a:pPr>
+                  <a:defRPr sz="1200"/>
+                </a:pPr>
+              </a:p>
+            </c:txPr>
+            <c:showLegendKey val="0"/>
+            <c:showVal val="1"/>
+            <c:showCatName val="0"/>
+            <c:showSerName val="0"/>
+            <c:showPercent val="0"/>
+            <c:showBubbleSize val="0"/>
+            <c:showLeaderLines val="1"/>
+          </c:dLbls>
+          <c:cat>
+            <c:strRef>
+              <c:f>Sheet1!$A$2:$A$5</c:f>
+              <c:strCache>
+                <c:ptCount val="4"/>
+                <c:pt idx="0">
+                  <c:v>Letras</c:v>
+                </c:pt>
+                <c:pt idx="1">
+                  <c:v>Dígitos</c:v>
+                </c:pt>
+                <c:pt idx="2">
+                  <c:v>Símbolos</c:v>
+                </c:pt>
+                <c:pt idx="3">
+                  <c:v>Espacios</c:v>
+                </c:pt>
+              </c:strCache>
+            </c:strRef>
+          </c:cat>
+          <c:val>
+            <c:numRef>
+              <c:f>Sheet1!$C$2:$C$5</c:f>
+              <c:numCache>
+                <c:formatCode>0.0%</c:formatCode>
+                <c:ptCount val="4"/>
+                <c:pt idx="0">
+                  <c:v>0.224</c:v>
+                </c:pt>
+                <c:pt idx="1">
+                  <c:v>0.202</c:v>
+                </c:pt>
+                <c:pt idx="2">
+                  <c:v>0.218</c:v>
+                </c:pt>
+                <c:pt idx="3">
+                  <c:v>0.455</c:v>
+                </c:pt>
+              </c:numCache>
+            </c:numRef>
+          </c:val>
+        </c:ser>
+        <c:ser>
+          <c:idx val="2"/>
+          <c:order val="2"/>
+          <c:tx>
+            <c:strRef>
+              <c:f>Sheet1!$D$1</c:f>
+              <c:strCache>
+                <c:ptCount val="1"/>
+                <c:pt idx="0">
+                  <c:v>M3 Transformer</c:v>
+                </c:pt>
+              </c:strCache>
+            </c:strRef>
+          </c:tx>
+          <c:spPr>
+            <a:solidFill xmlns:a="http://schemas.openxmlformats.org/drawingml/2006/main">
+              <a:srgbClr val="009E73"/>
+            </a:solidFill>
+          </c:spPr>
+          <c:invertIfNegative val="0"/>
+          <c:dLbls>
+            <c:numFmt formatCode="0%" sourceLinked="0"/>
+            <c:txPr xmlns:a="http://schemas.openxmlformats.org/drawingml/2006/main">
+              <a:bodyPr/>
+              <a:lstStyle/>
+              <a:p>
+                <a:pPr>
+                  <a:defRPr sz="1200"/>
+                </a:pPr>
+              </a:p>
+            </c:txPr>
+            <c:showLegendKey val="0"/>
+            <c:showVal val="1"/>
+            <c:showCatName val="0"/>
+            <c:showSerName val="0"/>
+            <c:showPercent val="0"/>
+            <c:showBubbleSize val="0"/>
+            <c:showLeaderLines val="1"/>
+          </c:dLbls>
+          <c:cat>
+            <c:strRef>
+              <c:f>Sheet1!$A$2:$A$5</c:f>
+              <c:strCache>
+                <c:ptCount val="4"/>
+                <c:pt idx="0">
+                  <c:v>Letras</c:v>
+                </c:pt>
+                <c:pt idx="1">
+                  <c:v>Dígitos</c:v>
+                </c:pt>
+                <c:pt idx="2">
+                  <c:v>Símbolos</c:v>
+                </c:pt>
+                <c:pt idx="3">
+                  <c:v>Espacios</c:v>
+                </c:pt>
+              </c:strCache>
+            </c:strRef>
+          </c:cat>
+          <c:val>
+            <c:numRef>
+              <c:f>Sheet1!$D$2:$D$5</c:f>
+              <c:numCache>
+                <c:formatCode>0.0%</c:formatCode>
+                <c:ptCount val="4"/>
+                <c:pt idx="0">
+                  <c:v>0.232</c:v>
+                </c:pt>
+                <c:pt idx="1">
+                  <c:v>0.199</c:v>
+                </c:pt>
+                <c:pt idx="2">
+                  <c:v>0.229</c:v>
+                </c:pt>
+                <c:pt idx="3">
+                  <c:v>0.452</c:v>
                 </c:pt>
               </c:numCache>
             </c:numRef>
@@ -3881,6 +4354,18 @@
         <c:majorUnit val="0.1"/>
       </c:valAx>
     </c:plotArea>
+    <c:legend>
+      <c:overlay val="0"/>
+      <c:txPr xmlns:a="http://schemas.openxmlformats.org/drawingml/2006/main">
+        <a:bodyPr/>
+        <a:lstStyle/>
+        <a:p>
+          <a:pPr>
+            <a:defRPr sz="1400"/>
+          </a:pPr>
+        </a:p>
+      </c:txPr>
+    </c:legend>
     <c:plotVisOnly val="1"/>
   </c:chart>
   <c:externalData r:id="rIdChartSnapshot1">
@@ -4214,6 +4699,45 @@
                 <a:cs typeface="Arial"/>
               </a:rPr>
               <a:t>12 de octubre de 2026</a:t>
+            </a:r>
+          </a:p>
+        </p:txBody>
+      </p:sp>
+      <p:sp xmlns:a="http://schemas.openxmlformats.org/drawingml/2006/main">
+        <p:nvSpPr>
+          <p:cNvPr id="6" name="TextBox 5"/>
+          <p:cNvSpPr txBox="1"/>
+          <p:nvPr/>
+        </p:nvSpPr>
+        <p:spPr>
+          <a:xfrm>
+            <a:off x="647700" y="4600000"/>
+            <a:ext cx="10287000" cy="700000"/>
+          </a:xfrm>
+          <a:prstGeom prst="rect">
+            <a:avLst/>
+          </a:prstGeom>
+          <a:noFill/>
+        </p:spPr>
+        <p:txBody>
+          <a:bodyPr wrap="square">
+            <a:spAutoFit/>
+          </a:bodyPr>
+          <a:lstStyle/>
+          <a:p>
+            <a:pPr>
+              <a:spcAft>
+                <a:spcPts val="1000"/>
+              </a:spcAft>
+            </a:pPr>
+            <a:r>
+              <a:rPr sz="1600" b="0">
+                <a:solidFill>
+                  <a:srgbClr val="F5F5F0"/>
+                </a:solidFill>
+                <a:latin typeface="Arial"/>
+              </a:rPr>
+              <a:t>Diego José López Campos 23242 · Luis González 23353 · Diego Rosales 23258</a:t>
             </a:r>
           </a:p>
         </p:txBody>
@@ -4440,7 +4964,7 @@
                 <a:ea typeface="Arial"/>
                 <a:cs typeface="Arial"/>
               </a:rPr>
-              <a:t>10</a:t>
+              <a:t>14</a:t>
             </a:r>
           </a:p>
         </p:txBody>
@@ -4931,39 +5455,11 @@
                 <a:ea typeface="Arial"/>
                 <a:cs typeface="Arial"/>
               </a:rPr>
-              <a:t>11</a:t>
-            </a:r>
-          </a:p>
-        </p:txBody>
-      </p:sp>
-      <p:pic>
-        <p:nvPicPr>
-          <p:cNvPr id="4" name="">
-            <a:extLst xmlns:a="http://schemas.openxmlformats.org/drawingml/2006/main">
-              <a:ext uri="{FF2B5EF4-FFF2-40B4-BE49-F238E27FC236}">
-                <a16:creationId xmlns:a16="http://schemas.microsoft.com/office/drawing/2014/main" id="{B368EF73-0D43-4222-8E22-491F4A97995C}"/>
-              </a:ext>
-            </a:extLst>
-          </p:cNvPr>
-          <p:cNvPicPr>
-            <a:picLocks xmlns:a="http://schemas.openxmlformats.org/drawingml/2006/main" noChangeAspect="1"/>
-          </p:cNvPicPr>
-          <p:nvPr/>
-        </p:nvPicPr>
-        <p:blipFill>
-          <a:blip xmlns:r="http://schemas.openxmlformats.org/officeDocument/2006/relationships" xmlns:a="http://schemas.openxmlformats.org/drawingml/2006/main" r:embed="R3e4b0f53823142ad"/>
-          <a:stretch xmlns:a="http://schemas.openxmlformats.org/drawingml/2006/main"/>
-        </p:blipFill>
-        <p:spPr>
-          <a:xfrm xmlns:a="http://schemas.openxmlformats.org/drawingml/2006/main">
-            <a:off x="1244346" y="1562100"/>
-            <a:ext cx="6350508" cy="4410075"/>
-          </a:xfrm>
-          <a:prstGeom xmlns:a="http://schemas.openxmlformats.org/drawingml/2006/main" prst="rect">
-            <a:avLst/>
-          </a:prstGeom>
-        </p:spPr>
-      </p:pic>
+              <a:t>15</a:t>
+            </a:r>
+          </a:p>
+        </p:txBody>
+      </p:sp>
       <p:sp>
         <p:nvSpPr>
           <p:cNvPr id="5" name="">
@@ -5086,6 +5582,30 @@
           </a:p>
         </p:txBody>
       </p:sp>
+      <p:pic xmlns:a="http://schemas.openxmlformats.org/drawingml/2006/main" xmlns:r="http://schemas.openxmlformats.org/officeDocument/2006/relationships">
+        <p:nvPicPr>
+          <p:cNvPr id="7" name="Picture 6" descr="rendimiento.png"/>
+          <p:cNvPicPr>
+            <a:picLocks noChangeAspect="1"/>
+          </p:cNvPicPr>
+          <p:nvPr/>
+        </p:nvPicPr>
+        <p:blipFill>
+          <a:blip r:embed="rId4"/>
+          <a:stretch>
+            <a:fillRect/>
+          </a:stretch>
+        </p:blipFill>
+        <p:spPr>
+          <a:xfrm>
+            <a:off x="1244346" y="1562100"/>
+            <a:ext cx="6013738" cy="4410075"/>
+          </a:xfrm>
+          <a:prstGeom prst="rect">
+            <a:avLst/>
+          </a:prstGeom>
+        </p:spPr>
+      </p:pic>
     </p:spTree>
     <p:extLst>
       <p:ext uri="{BB962C8B-B14F-4D97-AF65-F5344CB8AC3E}">
@@ -5176,7 +5696,7 @@
                 <a:ea typeface="Arial"/>
                 <a:cs typeface="Arial"/>
               </a:rPr>
-              <a:t>Demostración y límites actuales</a:t>
+              <a:t>Límites y siguiente paso</a:t>
             </a:r>
           </a:p>
         </p:txBody>
@@ -5308,7 +5828,7 @@
                 <a:ea typeface="Arial"/>
                 <a:cs typeface="Arial"/>
               </a:rPr>
-              <a:t>12</a:t>
+              <a:t>16</a:t>
             </a:r>
           </a:p>
         </p:txBody>
@@ -5440,7 +5960,7 @@
                 <a:ea typeface="Arial"/>
                 <a:cs typeface="Arial"/>
               </a:rPr>
-              <a:t>Respaldo: grabación local con predicción, exploración y rendimiento.</a:t>
+              <a:t>Respaldo: video de la app por si falla la demo en vivo.</a:t>
             </a:r>
           </a:p>
         </p:txBody>
@@ -5584,6 +6104,2175 @@
       </p:ext>
     </p:extLst>
   </p:cSld>
+</p:sld>
+</file>
+
+<file path=ppt/slides/slide13.xml><?xml version="1.0" encoding="utf-8"?>
+<p:sld xmlns:a="http://schemas.openxmlformats.org/drawingml/2006/main" xmlns:p="http://schemas.openxmlformats.org/presentationml/2006/main" xmlns:r="http://schemas.openxmlformats.org/officeDocument/2006/relationships">
+  <p:cSld>
+    <p:bg>
+      <p:bgPr>
+        <a:solidFill>
+          <a:srgbClr val="EEEFEC"/>
+        </a:solidFill>
+      </p:bgPr>
+    </p:bg>
+    <p:spTree>
+      <p:nvGrpSpPr>
+        <p:cNvPr id="1" name=""/>
+        <p:cNvGrpSpPr/>
+        <p:nvPr/>
+      </p:nvGrpSpPr>
+      <p:grpSpPr/>
+      <p:sp>
+        <p:nvSpPr>
+          <p:cNvPr id="8" name="">
+            <a:extLst>
+              <a:ext uri="{FF2B5EF4-FFF2-40B4-BE49-F238E27FC236}">
+                <a16:creationId xmlns:a16="http://schemas.microsoft.com/office/drawing/2014/main" id="{5F0C0C5B-88A8-4B4D-9EDB-48822A8DAFA3}"/>
+              </a:ext>
+            </a:extLst>
+          </p:cNvPr>
+          <p:cNvSpPr>
+            <a:spLocks noGrp="1"/>
+          </p:cNvSpPr>
+          <p:nvPr/>
+        </p:nvSpPr>
+        <p:spPr>
+          <a:xfrm>
+            <a:off x="609600" y="495300"/>
+            <a:ext cx="10972800" cy="857250"/>
+          </a:xfrm>
+          <a:prstGeom prst="rect">
+            <a:avLst/>
+          </a:prstGeom>
+          <a:noFill/>
+          <a:ln w="0">
+            <a:noFill/>
+          </a:ln>
+        </p:spPr>
+        <p:txBody>
+          <a:bodyPr/>
+          <a:lstStyle>
+            <a:defPPr>
+              <a:defRPr sz="3450" b="1">
+                <a:solidFill>
+                  <a:srgbClr val="111213"/>
+                </a:solidFill>
+                <a:latin typeface="Arial"/>
+                <a:ea typeface="Arial"/>
+                <a:cs typeface="Arial"/>
+              </a:defRPr>
+            </a:defPPr>
+          </a:lstStyle>
+          <a:p>
+            <a:pPr>
+              <a:defRPr sz="3450" b="1">
+                <a:solidFill>
+                  <a:srgbClr val="111213"/>
+                </a:solidFill>
+                <a:latin typeface="Arial"/>
+                <a:ea typeface="Arial"/>
+                <a:cs typeface="Arial"/>
+              </a:defRPr>
+            </a:pPr>
+            <a:r>
+              <a:rPr sz="3450" b="1">
+                <a:solidFill>
+                  <a:srgbClr val="111213"/>
+                </a:solidFill>
+                <a:latin typeface="Arial"/>
+                <a:ea typeface="Arial"/>
+                <a:cs typeface="Arial"/>
+              </a:rPr>
+              <a:t>Objetivos</a:t>
+            </a:r>
+          </a:p>
+        </p:txBody>
+      </p:sp>
+      <p:sp>
+        <p:nvSpPr>
+          <p:cNvPr id="2" name="">
+            <a:extLst>
+              <a:ext uri="{FF2B5EF4-FFF2-40B4-BE49-F238E27FC236}">
+                <a16:creationId xmlns:a16="http://schemas.microsoft.com/office/drawing/2014/main" id="{6CF16C09-F0DD-4B18-A8E9-4739423997C0}"/>
+              </a:ext>
+            </a:extLst>
+          </p:cNvPr>
+          <p:cNvSpPr>
+            <a:spLocks noGrp="1"/>
+          </p:cNvSpPr>
+          <p:nvPr/>
+        </p:nvSpPr>
+        <p:spPr>
+          <a:xfrm>
+            <a:off x="609600" y="6438900"/>
+            <a:ext cx="9715500" cy="228600"/>
+          </a:xfrm>
+          <a:prstGeom prst="rect">
+            <a:avLst/>
+          </a:prstGeom>
+          <a:noFill/>
+          <a:ln w="0">
+            <a:noFill/>
+          </a:ln>
+        </p:spPr>
+        <p:txBody>
+          <a:bodyPr/>
+          <a:lstStyle>
+            <a:defPPr>
+              <a:defRPr sz="1200" b="0">
+                <a:solidFill>
+                  <a:srgbClr val="55585C"/>
+                </a:solidFill>
+                <a:latin typeface="Arial"/>
+                <a:ea typeface="Arial"/>
+                <a:cs typeface="Arial"/>
+              </a:defRPr>
+            </a:defPPr>
+          </a:lstStyle>
+          <a:p>
+            <a:pPr>
+              <a:defRPr sz="1200" b="0">
+                <a:solidFill>
+                  <a:srgbClr val="55585C"/>
+                </a:solidFill>
+                <a:latin typeface="Arial"/>
+                <a:ea typeface="Arial"/>
+                <a:cs typeface="Arial"/>
+              </a:defRPr>
+            </a:pPr>
+            <a:r>
+              <a:rPr sz="1200" b="0">
+                <a:solidFill>
+                  <a:srgbClr val="55585C"/>
+                </a:solidFill>
+                <a:latin typeface="Arial"/>
+                <a:ea typeface="Arial"/>
+                <a:cs typeface="Arial"/>
+              </a:rPr>
+              <a:t>CC3084 · Reconocimiento de deletreo manual de ASL</a:t>
+            </a:r>
+          </a:p>
+        </p:txBody>
+      </p:sp>
+      <p:sp>
+        <p:nvSpPr>
+          <p:cNvPr id="3" name="">
+            <a:extLst>
+              <a:ext uri="{FF2B5EF4-FFF2-40B4-BE49-F238E27FC236}">
+                <a16:creationId xmlns:a16="http://schemas.microsoft.com/office/drawing/2014/main" id="{FE3440C3-482F-43B1-B2A2-F07301C84FD6}"/>
+              </a:ext>
+            </a:extLst>
+          </p:cNvPr>
+          <p:cNvSpPr>
+            <a:spLocks noGrp="1"/>
+          </p:cNvSpPr>
+          <p:nvPr/>
+        </p:nvSpPr>
+        <p:spPr>
+          <a:xfrm>
+            <a:off x="11144250" y="6438900"/>
+            <a:ext cx="476250" cy="228600"/>
+          </a:xfrm>
+          <a:prstGeom prst="rect">
+            <a:avLst/>
+          </a:prstGeom>
+          <a:noFill/>
+          <a:ln w="0">
+            <a:noFill/>
+          </a:ln>
+        </p:spPr>
+        <p:txBody>
+          <a:bodyPr/>
+          <a:lstStyle>
+            <a:defPPr>
+              <a:defRPr sz="1200" b="0">
+                <a:solidFill>
+                  <a:srgbClr val="55585C"/>
+                </a:solidFill>
+                <a:latin typeface="Arial"/>
+                <a:ea typeface="Arial"/>
+                <a:cs typeface="Arial"/>
+              </a:defRPr>
+            </a:defPPr>
+          </a:lstStyle>
+          <a:p>
+            <a:pPr>
+              <a:defRPr sz="1200" b="0">
+                <a:solidFill>
+                  <a:srgbClr val="55585C"/>
+                </a:solidFill>
+                <a:latin typeface="Arial"/>
+                <a:ea typeface="Arial"/>
+                <a:cs typeface="Arial"/>
+              </a:defRPr>
+            </a:pPr>
+            <a:r>
+              <a:rPr sz="1200" b="0">
+                <a:solidFill>
+                  <a:srgbClr val="55585C"/>
+                </a:solidFill>
+                <a:latin typeface="Arial"/>
+                <a:ea typeface="Arial"/>
+                <a:cs typeface="Arial"/>
+              </a:rPr>
+              <a:t>03</a:t>
+            </a:r>
+          </a:p>
+        </p:txBody>
+      </p:sp>
+      <p:sp>
+        <p:nvSpPr>
+          <p:cNvPr id="9" name="TextBox 8"/>
+          <p:cNvSpPr txBox="1"/>
+          <p:nvPr/>
+        </p:nvSpPr>
+        <p:spPr>
+          <a:xfrm>
+            <a:off x="609600" y="1600000"/>
+            <a:ext cx="10900000" cy="900000"/>
+          </a:xfrm>
+          <a:prstGeom prst="rect">
+            <a:avLst/>
+          </a:prstGeom>
+          <a:noFill/>
+        </p:spPr>
+        <p:txBody>
+          <a:bodyPr wrap="square">
+            <a:spAutoFit/>
+          </a:bodyPr>
+          <a:lstStyle/>
+          <a:p>
+            <a:pPr>
+              <a:spcAft>
+                <a:spcPts val="1000"/>
+              </a:spcAft>
+            </a:pPr>
+            <a:r>
+              <a:rPr sz="2400" b="1">
+                <a:solidFill>
+                  <a:srgbClr val="111213"/>
+                </a:solidFill>
+                <a:latin typeface="Arial"/>
+              </a:rPr>
+              <a:t>General: </a:t>
+            </a:r>
+            <a:r>
+              <a:rPr sz="2400" b="0">
+                <a:solidFill>
+                  <a:srgbClr val="111213"/>
+                </a:solidFill>
+                <a:latin typeface="Arial"/>
+              </a:rPr>
+              <a:t>transcribir a texto el deletreo manual de ASL a partir de landmarks.</a:t>
+            </a:r>
+          </a:p>
+        </p:txBody>
+      </p:sp>
+      <p:sp>
+        <p:nvSpPr>
+          <p:cNvPr id="10" name="TextBox 9"/>
+          <p:cNvSpPr txBox="1"/>
+          <p:nvPr/>
+        </p:nvSpPr>
+        <p:spPr>
+          <a:xfrm>
+            <a:off x="609600" y="2600000"/>
+            <a:ext cx="10900000" cy="3600000"/>
+          </a:xfrm>
+          <a:prstGeom prst="rect">
+            <a:avLst/>
+          </a:prstGeom>
+          <a:noFill/>
+        </p:spPr>
+        <p:txBody>
+          <a:bodyPr wrap="square">
+            <a:spAutoFit/>
+          </a:bodyPr>
+          <a:lstStyle/>
+          <a:p>
+            <a:pPr>
+              <a:spcAft>
+                <a:spcPts val="800"/>
+              </a:spcAft>
+            </a:pPr>
+            <a:r>
+              <a:rPr sz="2100" b="0">
+                <a:solidFill>
+                  <a:srgbClr val="111213"/>
+                </a:solidFill>
+                <a:latin typeface="Arial"/>
+              </a:rPr>
+              <a:t>1. Un solo preprocesamiento para entrenar y para la app.</a:t>
+            </a:r>
+          </a:p>
+          <a:p>
+            <a:pPr>
+              <a:spcAft>
+                <a:spcPts val="800"/>
+              </a:spcAft>
+            </a:pPr>
+            <a:r>
+              <a:rPr sz="2100" b="0">
+                <a:solidFill>
+                  <a:srgbClr val="111213"/>
+                </a:solidFill>
+                <a:latin typeface="Arial"/>
+              </a:rPr>
+              <a:t>2. Separar los datos por persona, para evaluar con gente nueva.</a:t>
+            </a:r>
+          </a:p>
+          <a:p>
+            <a:pPr>
+              <a:spcAft>
+                <a:spcPts val="800"/>
+              </a:spcAft>
+            </a:pPr>
+            <a:r>
+              <a:rPr sz="2100" b="0">
+                <a:solidFill>
+                  <a:srgbClr val="111213"/>
+                </a:solidFill>
+                <a:latin typeface="Arial"/>
+              </a:rPr>
+              <a:t>3. Entrenar tres modelos CTC con el corpus completo.</a:t>
+            </a:r>
+          </a:p>
+          <a:p>
+            <a:pPr>
+              <a:spcAft>
+                <a:spcPts val="800"/>
+              </a:spcAft>
+            </a:pPr>
+            <a:r>
+              <a:rPr sz="2100" b="0">
+                <a:solidFill>
+                  <a:srgbClr val="111213"/>
+                </a:solidFill>
+                <a:latin typeface="Arial"/>
+              </a:rPr>
+              <a:t>4. Compararlos con métricas de error y de costo.</a:t>
+            </a:r>
+          </a:p>
+          <a:p>
+            <a:pPr>
+              <a:spcAft>
+                <a:spcPts val="800"/>
+              </a:spcAft>
+            </a:pPr>
+            <a:r>
+              <a:rPr sz="2100" b="0">
+                <a:solidFill>
+                  <a:srgbClr val="111213"/>
+                </a:solidFill>
+                <a:latin typeface="Arial"/>
+              </a:rPr>
+              <a:t>5. Relacionar los errores con el análisis exploratorio.</a:t>
+            </a:r>
+          </a:p>
+          <a:p>
+            <a:pPr>
+              <a:spcAft>
+                <a:spcPts val="800"/>
+              </a:spcAft>
+            </a:pPr>
+            <a:r>
+              <a:rPr sz="2100" b="0">
+                <a:solidFill>
+                  <a:srgbClr val="111213"/>
+                </a:solidFill>
+                <a:latin typeface="Arial"/>
+              </a:rPr>
+              <a:t>6. Una app que prediga y muestre los resultados.</a:t>
+            </a:r>
+          </a:p>
+        </p:txBody>
+      </p:sp>
+    </p:spTree>
+  </p:cSld>
+  <p:clrMapOvr>
+    <a:masterClrMapping/>
+  </p:clrMapOvr>
+</p:sld>
+</file>
+
+<file path=ppt/slides/slide14.xml><?xml version="1.0" encoding="utf-8"?>
+<p:sld xmlns:a="http://schemas.openxmlformats.org/drawingml/2006/main" xmlns:p="http://schemas.openxmlformats.org/presentationml/2006/main" xmlns:r="http://schemas.openxmlformats.org/officeDocument/2006/relationships">
+  <p:cSld>
+    <p:bg>
+      <p:bgPr>
+        <a:solidFill>
+          <a:srgbClr val="EEEFEC"/>
+        </a:solidFill>
+      </p:bgPr>
+    </p:bg>
+    <p:spTree>
+      <p:nvGrpSpPr>
+        <p:cNvPr id="1" name=""/>
+        <p:cNvGrpSpPr/>
+        <p:nvPr/>
+      </p:nvGrpSpPr>
+      <p:grpSpPr/>
+      <p:sp>
+        <p:nvSpPr>
+          <p:cNvPr id="8" name="">
+            <a:extLst>
+              <a:ext uri="{FF2B5EF4-FFF2-40B4-BE49-F238E27FC236}">
+                <a16:creationId xmlns:a16="http://schemas.microsoft.com/office/drawing/2014/main" id="{5F0C0C5B-88A8-4B4D-9EDB-48822A8DAFA3}"/>
+              </a:ext>
+            </a:extLst>
+          </p:cNvPr>
+          <p:cNvSpPr>
+            <a:spLocks noGrp="1"/>
+          </p:cNvSpPr>
+          <p:nvPr/>
+        </p:nvSpPr>
+        <p:spPr>
+          <a:xfrm>
+            <a:off x="609600" y="495300"/>
+            <a:ext cx="10972800" cy="857250"/>
+          </a:xfrm>
+          <a:prstGeom prst="rect">
+            <a:avLst/>
+          </a:prstGeom>
+          <a:noFill/>
+          <a:ln w="0">
+            <a:noFill/>
+          </a:ln>
+        </p:spPr>
+        <p:txBody>
+          <a:bodyPr/>
+          <a:lstStyle>
+            <a:defPPr>
+              <a:defRPr sz="3450" b="1">
+                <a:solidFill>
+                  <a:srgbClr val="111213"/>
+                </a:solidFill>
+                <a:latin typeface="Arial"/>
+                <a:ea typeface="Arial"/>
+                <a:cs typeface="Arial"/>
+              </a:defRPr>
+            </a:defPPr>
+          </a:lstStyle>
+          <a:p>
+            <a:pPr>
+              <a:defRPr sz="3450" b="1">
+                <a:solidFill>
+                  <a:srgbClr val="111213"/>
+                </a:solidFill>
+                <a:latin typeface="Arial"/>
+                <a:ea typeface="Arial"/>
+                <a:cs typeface="Arial"/>
+              </a:defRPr>
+            </a:pPr>
+            <a:r>
+              <a:rPr sz="3450" b="1">
+                <a:solidFill>
+                  <a:srgbClr val="111213"/>
+                </a:solidFill>
+                <a:latin typeface="Arial"/>
+                <a:ea typeface="Arial"/>
+                <a:cs typeface="Arial"/>
+              </a:rPr>
+              <a:t>Hiperparámetros y métricas</a:t>
+            </a:r>
+          </a:p>
+        </p:txBody>
+      </p:sp>
+      <p:sp>
+        <p:nvSpPr>
+          <p:cNvPr id="2" name="">
+            <a:extLst>
+              <a:ext uri="{FF2B5EF4-FFF2-40B4-BE49-F238E27FC236}">
+                <a16:creationId xmlns:a16="http://schemas.microsoft.com/office/drawing/2014/main" id="{6CF16C09-F0DD-4B18-A8E9-4739423997C0}"/>
+              </a:ext>
+            </a:extLst>
+          </p:cNvPr>
+          <p:cNvSpPr>
+            <a:spLocks noGrp="1"/>
+          </p:cNvSpPr>
+          <p:nvPr/>
+        </p:nvSpPr>
+        <p:spPr>
+          <a:xfrm>
+            <a:off x="609600" y="6438900"/>
+            <a:ext cx="9715500" cy="228600"/>
+          </a:xfrm>
+          <a:prstGeom prst="rect">
+            <a:avLst/>
+          </a:prstGeom>
+          <a:noFill/>
+          <a:ln w="0">
+            <a:noFill/>
+          </a:ln>
+        </p:spPr>
+        <p:txBody>
+          <a:bodyPr/>
+          <a:lstStyle>
+            <a:defPPr>
+              <a:defRPr sz="1200" b="0">
+                <a:solidFill>
+                  <a:srgbClr val="55585C"/>
+                </a:solidFill>
+                <a:latin typeface="Arial"/>
+                <a:ea typeface="Arial"/>
+                <a:cs typeface="Arial"/>
+              </a:defRPr>
+            </a:defPPr>
+          </a:lstStyle>
+          <a:p>
+            <a:pPr>
+              <a:defRPr sz="1200" b="0">
+                <a:solidFill>
+                  <a:srgbClr val="55585C"/>
+                </a:solidFill>
+                <a:latin typeface="Arial"/>
+                <a:ea typeface="Arial"/>
+                <a:cs typeface="Arial"/>
+              </a:defRPr>
+            </a:pPr>
+            <a:r>
+              <a:rPr sz="1200" b="0">
+                <a:solidFill>
+                  <a:srgbClr val="55585C"/>
+                </a:solidFill>
+                <a:latin typeface="Arial"/>
+                <a:ea typeface="Arial"/>
+                <a:cs typeface="Arial"/>
+              </a:rPr>
+              <a:t>CC3084 · Reconocimiento de deletreo manual de ASL</a:t>
+            </a:r>
+          </a:p>
+        </p:txBody>
+      </p:sp>
+      <p:sp>
+        <p:nvSpPr>
+          <p:cNvPr id="3" name="">
+            <a:extLst>
+              <a:ext uri="{FF2B5EF4-FFF2-40B4-BE49-F238E27FC236}">
+                <a16:creationId xmlns:a16="http://schemas.microsoft.com/office/drawing/2014/main" id="{FE3440C3-482F-43B1-B2A2-F07301C84FD6}"/>
+              </a:ext>
+            </a:extLst>
+          </p:cNvPr>
+          <p:cNvSpPr>
+            <a:spLocks noGrp="1"/>
+          </p:cNvSpPr>
+          <p:nvPr/>
+        </p:nvSpPr>
+        <p:spPr>
+          <a:xfrm>
+            <a:off x="11144250" y="6438900"/>
+            <a:ext cx="476250" cy="228600"/>
+          </a:xfrm>
+          <a:prstGeom prst="rect">
+            <a:avLst/>
+          </a:prstGeom>
+          <a:noFill/>
+          <a:ln w="0">
+            <a:noFill/>
+          </a:ln>
+        </p:spPr>
+        <p:txBody>
+          <a:bodyPr/>
+          <a:lstStyle>
+            <a:defPPr>
+              <a:defRPr sz="1200" b="0">
+                <a:solidFill>
+                  <a:srgbClr val="55585C"/>
+                </a:solidFill>
+                <a:latin typeface="Arial"/>
+                <a:ea typeface="Arial"/>
+                <a:cs typeface="Arial"/>
+              </a:defRPr>
+            </a:defPPr>
+          </a:lstStyle>
+          <a:p>
+            <a:pPr>
+              <a:defRPr sz="1200" b="0">
+                <a:solidFill>
+                  <a:srgbClr val="55585C"/>
+                </a:solidFill>
+                <a:latin typeface="Arial"/>
+                <a:ea typeface="Arial"/>
+                <a:cs typeface="Arial"/>
+              </a:defRPr>
+            </a:pPr>
+            <a:r>
+              <a:rPr sz="1200" b="0">
+                <a:solidFill>
+                  <a:srgbClr val="55585C"/>
+                </a:solidFill>
+                <a:latin typeface="Arial"/>
+                <a:ea typeface="Arial"/>
+                <a:cs typeface="Arial"/>
+              </a:rPr>
+              <a:t>07</a:t>
+            </a:r>
+          </a:p>
+        </p:txBody>
+      </p:sp>
+      <p:graphicFrame>
+        <p:nvGraphicFramePr>
+          <p:cNvPr id="9" name="Table 8"/>
+          <p:cNvGraphicFramePr>
+            <a:graphicFrameLocks noGrp="1"/>
+          </p:cNvGraphicFramePr>
+          <p:nvPr/>
+        </p:nvGraphicFramePr>
+        <p:xfrm>
+          <a:off x="609600" y="1550000"/>
+          <a:ext cx="10972800" cy="1920000"/>
+        </p:xfrm>
+        <a:graphic>
+          <a:graphicData uri="http://schemas.openxmlformats.org/drawingml/2006/table">
+            <a:tbl>
+              <a:tblPr firstRow="1">
+                <a:tableStyleId>{5C22544A-7EE6-4342-B048-85BDC9FD1C3A}</a:tableStyleId>
+              </a:tblPr>
+              <a:tblGrid>
+                <a:gridCol w="2400000"/>
+                <a:gridCol w="4372800"/>
+                <a:gridCol w="1900000"/>
+                <a:gridCol w="2300000"/>
+              </a:tblGrid>
+              <a:tr h="480000">
+                <a:tc>
+                  <a:txBody>
+                    <a:bodyPr/>
+                    <a:lstStyle/>
+                    <a:p>
+                      <a:r>
+                        <a:rPr sz="1700" b="1">
+                          <a:solidFill>
+                            <a:srgbClr val="55585C"/>
+                          </a:solidFill>
+                          <a:latin typeface="Arial"/>
+                        </a:rPr>
+                        <a:t>Modelo</a:t>
+                      </a:r>
+                    </a:p>
+                  </a:txBody>
+                  <a:tcPr marL="70000" marR="70000">
+                    <a:noFill/>
+                  </a:tcPr>
+                </a:tc>
+                <a:tc>
+                  <a:txBody>
+                    <a:bodyPr/>
+                    <a:lstStyle/>
+                    <a:p>
+                      <a:r>
+                        <a:rPr sz="1700" b="1">
+                          <a:solidFill>
+                            <a:srgbClr val="55585C"/>
+                          </a:solidFill>
+                          <a:latin typeface="Arial"/>
+                        </a:rPr>
+                        <a:t>Configuración elegida</a:t>
+                      </a:r>
+                    </a:p>
+                  </a:txBody>
+                  <a:tcPr marL="70000" marR="70000">
+                    <a:noFill/>
+                  </a:tcPr>
+                </a:tc>
+                <a:tc>
+                  <a:txBody>
+                    <a:bodyPr/>
+                    <a:lstStyle/>
+                    <a:p>
+                      <a:r>
+                        <a:rPr sz="1700" b="1">
+                          <a:solidFill>
+                            <a:srgbClr val="55585C"/>
+                          </a:solidFill>
+                          <a:latin typeface="Arial"/>
+                        </a:rPr>
+                        <a:t>Parámetros</a:t>
+                      </a:r>
+                    </a:p>
+                  </a:txBody>
+                  <a:tcPr marL="70000" marR="70000">
+                    <a:noFill/>
+                  </a:tcPr>
+                </a:tc>
+                <a:tc>
+                  <a:txBody>
+                    <a:bodyPr/>
+                    <a:lstStyle/>
+                    <a:p>
+                      <a:r>
+                        <a:rPr sz="1700" b="1">
+                          <a:solidFill>
+                            <a:srgbClr val="55585C"/>
+                          </a:solidFill>
+                          <a:latin typeface="Arial"/>
+                        </a:rPr>
+                        <a:t>Tasa de aprendizaje</a:t>
+                      </a:r>
+                    </a:p>
+                  </a:txBody>
+                  <a:tcPr marL="70000" marR="70000">
+                    <a:noFill/>
+                  </a:tcPr>
+                </a:tc>
+              </a:tr>
+              <a:tr h="480000">
+                <a:tc>
+                  <a:txBody>
+                    <a:bodyPr/>
+                    <a:lstStyle/>
+                    <a:p>
+                      <a:r>
+                        <a:rPr sz="1700" b="1">
+                          <a:solidFill>
+                            <a:srgbClr val="E69F00"/>
+                          </a:solidFill>
+                          <a:latin typeface="Arial"/>
+                        </a:rPr>
+                        <a:t>M1 BiGRU</a:t>
+                      </a:r>
+                    </a:p>
+                  </a:txBody>
+                  <a:tcPr marL="70000" marR="70000">
+                    <a:noFill/>
+                  </a:tcPr>
+                </a:tc>
+                <a:tc>
+                  <a:txBody>
+                    <a:bodyPr/>
+                    <a:lstStyle/>
+                    <a:p>
+                      <a:r>
+                        <a:rPr sz="1700" b="0">
+                          <a:solidFill>
+                            <a:srgbClr val="111213"/>
+                          </a:solidFill>
+                          <a:latin typeface="Arial"/>
+                        </a:rPr>
+                        <a:t>192 unidades · 3 capas</a:t>
+                      </a:r>
+                    </a:p>
+                  </a:txBody>
+                  <a:tcPr marL="70000" marR="70000">
+                    <a:noFill/>
+                  </a:tcPr>
+                </a:tc>
+                <a:tc>
+                  <a:txBody>
+                    <a:bodyPr/>
+                    <a:lstStyle/>
+                    <a:p>
+                      <a:r>
+                        <a:rPr sz="1700" b="0">
+                          <a:solidFill>
+                            <a:srgbClr val="111213"/>
+                          </a:solidFill>
+                          <a:latin typeface="Arial"/>
+                        </a:rPr>
+                        <a:t>1,67 M</a:t>
+                      </a:r>
+                    </a:p>
+                  </a:txBody>
+                  <a:tcPr marL="70000" marR="70000">
+                    <a:noFill/>
+                  </a:tcPr>
+                </a:tc>
+                <a:tc>
+                  <a:txBody>
+                    <a:bodyPr/>
+                    <a:lstStyle/>
+                    <a:p>
+                      <a:r>
+                        <a:rPr sz="1700" b="0">
+                          <a:solidFill>
+                            <a:srgbClr val="111213"/>
+                          </a:solidFill>
+                          <a:latin typeface="Arial"/>
+                        </a:rPr>
+                        <a:t>0,001</a:t>
+                      </a:r>
+                    </a:p>
+                  </a:txBody>
+                  <a:tcPr marL="70000" marR="70000">
+                    <a:noFill/>
+                  </a:tcPr>
+                </a:tc>
+              </a:tr>
+              <a:tr h="480000">
+                <a:tc>
+                  <a:txBody>
+                    <a:bodyPr/>
+                    <a:lstStyle/>
+                    <a:p>
+                      <a:r>
+                        <a:rPr sz="1700" b="1">
+                          <a:solidFill>
+                            <a:srgbClr val="56B4E9"/>
+                          </a:solidFill>
+                          <a:latin typeface="Arial"/>
+                        </a:rPr>
+                        <a:t>M2 TCN</a:t>
+                      </a:r>
+                    </a:p>
+                  </a:txBody>
+                  <a:tcPr marL="70000" marR="70000">
+                    <a:noFill/>
+                  </a:tcPr>
+                </a:tc>
+                <a:tc>
+                  <a:txBody>
+                    <a:bodyPr/>
+                    <a:lstStyle/>
+                    <a:p>
+                      <a:r>
+                        <a:rPr sz="1700" b="0">
+                          <a:solidFill>
+                            <a:srgbClr val="111213"/>
+                          </a:solidFill>
+                          <a:latin typeface="Arial"/>
+                        </a:rPr>
+                        <a:t>192 canales · 6 niveles · kernel 5</a:t>
+                      </a:r>
+                    </a:p>
+                  </a:txBody>
+                  <a:tcPr marL="70000" marR="70000">
+                    <a:noFill/>
+                  </a:tcPr>
+                </a:tc>
+                <a:tc>
+                  <a:txBody>
+                    <a:bodyPr/>
+                    <a:lstStyle/>
+                    <a:p>
+                      <a:r>
+                        <a:rPr sz="1700" b="0">
+                          <a:solidFill>
+                            <a:srgbClr val="111213"/>
+                          </a:solidFill>
+                          <a:latin typeface="Arial"/>
+                        </a:rPr>
+                        <a:t>1,14 M</a:t>
+                      </a:r>
+                    </a:p>
+                  </a:txBody>
+                  <a:tcPr marL="70000" marR="70000">
+                    <a:noFill/>
+                  </a:tcPr>
+                </a:tc>
+                <a:tc>
+                  <a:txBody>
+                    <a:bodyPr/>
+                    <a:lstStyle/>
+                    <a:p>
+                      <a:r>
+                        <a:rPr sz="1700" b="0">
+                          <a:solidFill>
+                            <a:srgbClr val="111213"/>
+                          </a:solidFill>
+                          <a:latin typeface="Arial"/>
+                        </a:rPr>
+                        <a:t>0,001</a:t>
+                      </a:r>
+                    </a:p>
+                  </a:txBody>
+                  <a:tcPr marL="70000" marR="70000">
+                    <a:noFill/>
+                  </a:tcPr>
+                </a:tc>
+              </a:tr>
+              <a:tr h="480000">
+                <a:tc>
+                  <a:txBody>
+                    <a:bodyPr/>
+                    <a:lstStyle/>
+                    <a:p>
+                      <a:r>
+                        <a:rPr sz="1700" b="1">
+                          <a:solidFill>
+                            <a:srgbClr val="009E73"/>
+                          </a:solidFill>
+                          <a:latin typeface="Arial"/>
+                        </a:rPr>
+                        <a:t>M3 Transformer</a:t>
+                      </a:r>
+                    </a:p>
+                  </a:txBody>
+                  <a:tcPr marL="70000" marR="70000">
+                    <a:noFill/>
+                  </a:tcPr>
+                </a:tc>
+                <a:tc>
+                  <a:txBody>
+                    <a:bodyPr/>
+                    <a:lstStyle/>
+                    <a:p>
+                      <a:r>
+                        <a:rPr sz="1700" b="0">
+                          <a:solidFill>
+                            <a:srgbClr val="111213"/>
+                          </a:solidFill>
+                          <a:latin typeface="Arial"/>
+                        </a:rPr>
+                        <a:t>d = 192 · 4 capas · 4 cabezas</a:t>
+                      </a:r>
+                    </a:p>
+                  </a:txBody>
+                  <a:tcPr marL="70000" marR="70000">
+                    <a:noFill/>
+                  </a:tcPr>
+                </a:tc>
+                <a:tc>
+                  <a:txBody>
+                    <a:bodyPr/>
+                    <a:lstStyle/>
+                    <a:p>
+                      <a:r>
+                        <a:rPr sz="1700" b="0">
+                          <a:solidFill>
+                            <a:srgbClr val="111213"/>
+                          </a:solidFill>
+                          <a:latin typeface="Arial"/>
+                        </a:rPr>
+                        <a:t>1,22 M</a:t>
+                      </a:r>
+                    </a:p>
+                  </a:txBody>
+                  <a:tcPr marL="70000" marR="70000">
+                    <a:noFill/>
+                  </a:tcPr>
+                </a:tc>
+                <a:tc>
+                  <a:txBody>
+                    <a:bodyPr/>
+                    <a:lstStyle/>
+                    <a:p>
+                      <a:r>
+                        <a:rPr sz="1700" b="0">
+                          <a:solidFill>
+                            <a:srgbClr val="111213"/>
+                          </a:solidFill>
+                          <a:latin typeface="Arial"/>
+                        </a:rPr>
+                        <a:t>0,0005</a:t>
+                      </a:r>
+                    </a:p>
+                  </a:txBody>
+                  <a:tcPr marL="70000" marR="70000">
+                    <a:noFill/>
+                  </a:tcPr>
+                </a:tc>
+              </a:tr>
+            </a:tbl>
+          </a:graphicData>
+        </a:graphic>
+      </p:graphicFrame>
+      <p:sp>
+        <p:nvSpPr>
+          <p:cNvPr id="10" name="TextBox 9"/>
+          <p:cNvSpPr txBox="1"/>
+          <p:nvPr/>
+        </p:nvSpPr>
+        <p:spPr>
+          <a:xfrm>
+            <a:off x="609600" y="3900000"/>
+            <a:ext cx="10900000" cy="2400000"/>
+          </a:xfrm>
+          <a:prstGeom prst="rect">
+            <a:avLst/>
+          </a:prstGeom>
+          <a:noFill/>
+        </p:spPr>
+        <p:txBody>
+          <a:bodyPr wrap="square">
+            <a:spAutoFit/>
+          </a:bodyPr>
+          <a:lstStyle/>
+          <a:p>
+            <a:pPr>
+              <a:spcAft>
+                <a:spcPts val="1000"/>
+              </a:spcAft>
+            </a:pPr>
+            <a:r>
+              <a:rPr sz="1900" b="1">
+                <a:solidFill>
+                  <a:srgbClr val="111213"/>
+                </a:solidFill>
+                <a:latin typeface="Arial"/>
+              </a:rPr>
+              <a:t>Igual para los tres: </a:t>
+            </a:r>
+            <a:r>
+              <a:rPr sz="1900" b="0">
+                <a:solidFill>
+                  <a:srgbClr val="111213"/>
+                </a:solidFill>
+                <a:latin typeface="Arial"/>
+              </a:rPr>
+              <a:t>AdamW, lotes de 32, hasta 15 épocas, parada temprana de 3, GPU T4.</a:t>
+            </a:r>
+          </a:p>
+          <a:p>
+            <a:pPr>
+              <a:spcAft>
+                <a:spcPts val="1000"/>
+              </a:spcAft>
+            </a:pPr>
+            <a:r>
+              <a:rPr sz="1900" b="1">
+                <a:solidFill>
+                  <a:srgbClr val="111213"/>
+                </a:solidFill>
+                <a:latin typeface="Arial"/>
+              </a:rPr>
+              <a:t>Métrica principal: </a:t>
+            </a:r>
+            <a:r>
+              <a:rPr sz="1900" b="0">
+                <a:solidFill>
+                  <a:srgbClr val="111213"/>
+                </a:solidFill>
+                <a:latin typeface="Arial"/>
+              </a:rPr>
+              <a:t>distancia de edición normalizada (menor es mejor).</a:t>
+            </a:r>
+          </a:p>
+          <a:p>
+            <a:pPr>
+              <a:spcAft>
+                <a:spcPts val="1000"/>
+              </a:spcAft>
+            </a:pPr>
+            <a:r>
+              <a:rPr sz="1900" b="1">
+                <a:solidFill>
+                  <a:srgbClr val="111213"/>
+                </a:solidFill>
+                <a:latin typeface="Arial"/>
+              </a:rPr>
+              <a:t>También: </a:t>
+            </a:r>
+            <a:r>
+              <a:rPr sz="1900" b="0">
+                <a:solidFill>
+                  <a:srgbClr val="111213"/>
+                </a:solidFill>
+                <a:latin typeface="Arial"/>
+              </a:rPr>
+              <a:t>CER, frases exactas, error por tipo de carácter y tiempo.</a:t>
+            </a:r>
+          </a:p>
+        </p:txBody>
+      </p:sp>
+    </p:spTree>
+  </p:cSld>
+  <p:clrMapOvr>
+    <a:masterClrMapping/>
+  </p:clrMapOvr>
+</p:sld>
+</file>
+
+<file path=ppt/slides/slide15.xml><?xml version="1.0" encoding="utf-8"?>
+<p:sld xmlns:a="http://schemas.openxmlformats.org/drawingml/2006/main" xmlns:p="http://schemas.openxmlformats.org/presentationml/2006/main" xmlns:r="http://schemas.openxmlformats.org/officeDocument/2006/relationships">
+  <p:cSld>
+    <p:bg>
+      <p:bgPr>
+        <a:solidFill>
+          <a:srgbClr val="EEEFEC"/>
+        </a:solidFill>
+      </p:bgPr>
+    </p:bg>
+    <p:spTree>
+      <p:nvGrpSpPr>
+        <p:cNvPr id="1" name=""/>
+        <p:cNvGrpSpPr/>
+        <p:nvPr/>
+      </p:nvGrpSpPr>
+      <p:grpSpPr/>
+      <p:sp>
+        <p:nvSpPr>
+          <p:cNvPr id="8" name="">
+            <a:extLst>
+              <a:ext uri="{FF2B5EF4-FFF2-40B4-BE49-F238E27FC236}">
+                <a16:creationId xmlns:a16="http://schemas.microsoft.com/office/drawing/2014/main" id="{5F0C0C5B-88A8-4B4D-9EDB-48822A8DAFA3}"/>
+              </a:ext>
+            </a:extLst>
+          </p:cNvPr>
+          <p:cNvSpPr>
+            <a:spLocks noGrp="1"/>
+          </p:cNvSpPr>
+          <p:nvPr/>
+        </p:nvSpPr>
+        <p:spPr>
+          <a:xfrm>
+            <a:off x="609600" y="495300"/>
+            <a:ext cx="10972800" cy="857250"/>
+          </a:xfrm>
+          <a:prstGeom prst="rect">
+            <a:avLst/>
+          </a:prstGeom>
+          <a:noFill/>
+          <a:ln w="0">
+            <a:noFill/>
+          </a:ln>
+        </p:spPr>
+        <p:txBody>
+          <a:bodyPr/>
+          <a:lstStyle>
+            <a:defPPr>
+              <a:defRPr sz="3450" b="1">
+                <a:solidFill>
+                  <a:srgbClr val="111213"/>
+                </a:solidFill>
+                <a:latin typeface="Arial"/>
+                <a:ea typeface="Arial"/>
+                <a:cs typeface="Arial"/>
+              </a:defRPr>
+            </a:defPPr>
+          </a:lstStyle>
+          <a:p>
+            <a:pPr>
+              <a:defRPr sz="3450" b="1">
+                <a:solidFill>
+                  <a:srgbClr val="111213"/>
+                </a:solidFill>
+                <a:latin typeface="Arial"/>
+                <a:ea typeface="Arial"/>
+                <a:cs typeface="Arial"/>
+              </a:defRPr>
+            </a:pPr>
+            <a:r>
+              <a:rPr sz="3450" b="1">
+                <a:solidFill>
+                  <a:srgbClr val="111213"/>
+                </a:solidFill>
+                <a:latin typeface="Arial"/>
+                <a:ea typeface="Arial"/>
+                <a:cs typeface="Arial"/>
+              </a:rPr>
+              <a:t>Comparación de los tres modelos</a:t>
+            </a:r>
+          </a:p>
+        </p:txBody>
+      </p:sp>
+      <p:sp>
+        <p:nvSpPr>
+          <p:cNvPr id="2" name="">
+            <a:extLst>
+              <a:ext uri="{FF2B5EF4-FFF2-40B4-BE49-F238E27FC236}">
+                <a16:creationId xmlns:a16="http://schemas.microsoft.com/office/drawing/2014/main" id="{6CF16C09-F0DD-4B18-A8E9-4739423997C0}"/>
+              </a:ext>
+            </a:extLst>
+          </p:cNvPr>
+          <p:cNvSpPr>
+            <a:spLocks noGrp="1"/>
+          </p:cNvSpPr>
+          <p:nvPr/>
+        </p:nvSpPr>
+        <p:spPr>
+          <a:xfrm>
+            <a:off x="609600" y="6438900"/>
+            <a:ext cx="9715500" cy="228600"/>
+          </a:xfrm>
+          <a:prstGeom prst="rect">
+            <a:avLst/>
+          </a:prstGeom>
+          <a:noFill/>
+          <a:ln w="0">
+            <a:noFill/>
+          </a:ln>
+        </p:spPr>
+        <p:txBody>
+          <a:bodyPr/>
+          <a:lstStyle>
+            <a:defPPr>
+              <a:defRPr sz="1200" b="0">
+                <a:solidFill>
+                  <a:srgbClr val="55585C"/>
+                </a:solidFill>
+                <a:latin typeface="Arial"/>
+                <a:ea typeface="Arial"/>
+                <a:cs typeface="Arial"/>
+              </a:defRPr>
+            </a:defPPr>
+          </a:lstStyle>
+          <a:p>
+            <a:pPr>
+              <a:defRPr sz="1200" b="0">
+                <a:solidFill>
+                  <a:srgbClr val="55585C"/>
+                </a:solidFill>
+                <a:latin typeface="Arial"/>
+                <a:ea typeface="Arial"/>
+                <a:cs typeface="Arial"/>
+              </a:defRPr>
+            </a:pPr>
+            <a:r>
+              <a:rPr sz="1200" b="0">
+                <a:solidFill>
+                  <a:srgbClr val="55585C"/>
+                </a:solidFill>
+                <a:latin typeface="Arial"/>
+                <a:ea typeface="Arial"/>
+                <a:cs typeface="Arial"/>
+              </a:rPr>
+              <a:t>CC3084 · Reconocimiento de deletreo manual de ASL</a:t>
+            </a:r>
+          </a:p>
+        </p:txBody>
+      </p:sp>
+      <p:sp>
+        <p:nvSpPr>
+          <p:cNvPr id="3" name="">
+            <a:extLst>
+              <a:ext uri="{FF2B5EF4-FFF2-40B4-BE49-F238E27FC236}">
+                <a16:creationId xmlns:a16="http://schemas.microsoft.com/office/drawing/2014/main" id="{FE3440C3-482F-43B1-B2A2-F07301C84FD6}"/>
+              </a:ext>
+            </a:extLst>
+          </p:cNvPr>
+          <p:cNvSpPr>
+            <a:spLocks noGrp="1"/>
+          </p:cNvSpPr>
+          <p:nvPr/>
+        </p:nvSpPr>
+        <p:spPr>
+          <a:xfrm>
+            <a:off x="11144250" y="6438900"/>
+            <a:ext cx="476250" cy="228600"/>
+          </a:xfrm>
+          <a:prstGeom prst="rect">
+            <a:avLst/>
+          </a:prstGeom>
+          <a:noFill/>
+          <a:ln w="0">
+            <a:noFill/>
+          </a:ln>
+        </p:spPr>
+        <p:txBody>
+          <a:bodyPr/>
+          <a:lstStyle>
+            <a:defPPr>
+              <a:defRPr sz="1200" b="0">
+                <a:solidFill>
+                  <a:srgbClr val="55585C"/>
+                </a:solidFill>
+                <a:latin typeface="Arial"/>
+                <a:ea typeface="Arial"/>
+                <a:cs typeface="Arial"/>
+              </a:defRPr>
+            </a:defPPr>
+          </a:lstStyle>
+          <a:p>
+            <a:pPr>
+              <a:defRPr sz="1200" b="0">
+                <a:solidFill>
+                  <a:srgbClr val="55585C"/>
+                </a:solidFill>
+                <a:latin typeface="Arial"/>
+                <a:ea typeface="Arial"/>
+                <a:cs typeface="Arial"/>
+              </a:defRPr>
+            </a:pPr>
+            <a:r>
+              <a:rPr sz="1200" b="0">
+                <a:solidFill>
+                  <a:srgbClr val="55585C"/>
+                </a:solidFill>
+                <a:latin typeface="Arial"/>
+                <a:ea typeface="Arial"/>
+                <a:cs typeface="Arial"/>
+              </a:rPr>
+              <a:t>09</a:t>
+            </a:r>
+          </a:p>
+        </p:txBody>
+      </p:sp>
+      <p:graphicFrame>
+        <p:nvGraphicFramePr>
+          <p:cNvPr id="9" name="Table 8"/>
+          <p:cNvGraphicFramePr>
+            <a:graphicFrameLocks noGrp="1"/>
+          </p:cNvGraphicFramePr>
+          <p:nvPr/>
+        </p:nvGraphicFramePr>
+        <p:xfrm>
+          <a:off x="609600" y="1600000"/>
+          <a:ext cx="10972800" cy="1920000"/>
+        </p:xfrm>
+        <a:graphic>
+          <a:graphicData uri="http://schemas.openxmlformats.org/drawingml/2006/table">
+            <a:tbl>
+              <a:tblPr firstRow="1">
+                <a:tableStyleId>{5C22544A-7EE6-4342-B048-85BDC9FD1C3A}</a:tableStyleId>
+              </a:tblPr>
+              <a:tblGrid>
+                <a:gridCol w="2700000"/>
+                <a:gridCol w="2372800"/>
+                <a:gridCol w="1700000"/>
+                <a:gridCol w="2200000"/>
+                <a:gridCol w="2000000"/>
+              </a:tblGrid>
+              <a:tr h="480000">
+                <a:tc>
+                  <a:txBody>
+                    <a:bodyPr/>
+                    <a:lstStyle/>
+                    <a:p>
+                      <a:r>
+                        <a:rPr sz="1900" b="1">
+                          <a:solidFill>
+                            <a:srgbClr val="55585C"/>
+                          </a:solidFill>
+                          <a:latin typeface="Arial"/>
+                        </a:rPr>
+                        <a:t>Modelo</a:t>
+                      </a:r>
+                    </a:p>
+                  </a:txBody>
+                  <a:tcPr marL="70000" marR="70000">
+                    <a:noFill/>
+                  </a:tcPr>
+                </a:tc>
+                <a:tc>
+                  <a:txBody>
+                    <a:bodyPr/>
+                    <a:lstStyle/>
+                    <a:p>
+                      <a:r>
+                        <a:rPr sz="1900" b="1">
+                          <a:solidFill>
+                            <a:srgbClr val="55585C"/>
+                          </a:solidFill>
+                          <a:latin typeface="Arial"/>
+                        </a:rPr>
+                        <a:t>Distancia edición</a:t>
+                      </a:r>
+                    </a:p>
+                  </a:txBody>
+                  <a:tcPr marL="70000" marR="70000">
+                    <a:noFill/>
+                  </a:tcPr>
+                </a:tc>
+                <a:tc>
+                  <a:txBody>
+                    <a:bodyPr/>
+                    <a:lstStyle/>
+                    <a:p>
+                      <a:r>
+                        <a:rPr sz="1900" b="1">
+                          <a:solidFill>
+                            <a:srgbClr val="55585C"/>
+                          </a:solidFill>
+                          <a:latin typeface="Arial"/>
+                        </a:rPr>
+                        <a:t>CER</a:t>
+                      </a:r>
+                    </a:p>
+                  </a:txBody>
+                  <a:tcPr marL="70000" marR="70000">
+                    <a:noFill/>
+                  </a:tcPr>
+                </a:tc>
+                <a:tc>
+                  <a:txBody>
+                    <a:bodyPr/>
+                    <a:lstStyle/>
+                    <a:p>
+                      <a:r>
+                        <a:rPr sz="1900" b="1">
+                          <a:solidFill>
+                            <a:srgbClr val="55585C"/>
+                          </a:solidFill>
+                          <a:latin typeface="Arial"/>
+                        </a:rPr>
+                        <a:t>Frases exactas</a:t>
+                      </a:r>
+                    </a:p>
+                  </a:txBody>
+                  <a:tcPr marL="70000" marR="70000">
+                    <a:noFill/>
+                  </a:tcPr>
+                </a:tc>
+                <a:tc>
+                  <a:txBody>
+                    <a:bodyPr/>
+                    <a:lstStyle/>
+                    <a:p>
+                      <a:r>
+                        <a:rPr sz="1900" b="1">
+                          <a:solidFill>
+                            <a:srgbClr val="55585C"/>
+                          </a:solidFill>
+                          <a:latin typeface="Arial"/>
+                        </a:rPr>
+                        <a:t>Entrenamiento</a:t>
+                      </a:r>
+                    </a:p>
+                  </a:txBody>
+                  <a:tcPr marL="70000" marR="70000">
+                    <a:noFill/>
+                  </a:tcPr>
+                </a:tc>
+              </a:tr>
+              <a:tr h="480000">
+                <a:tc>
+                  <a:txBody>
+                    <a:bodyPr/>
+                    <a:lstStyle/>
+                    <a:p>
+                      <a:r>
+                        <a:rPr sz="1900" b="1">
+                          <a:solidFill>
+                            <a:srgbClr val="E69F00"/>
+                          </a:solidFill>
+                          <a:latin typeface="Arial"/>
+                        </a:rPr>
+                        <a:t>M1 BiGRU</a:t>
+                      </a:r>
+                    </a:p>
+                  </a:txBody>
+                  <a:tcPr marL="70000" marR="70000">
+                    <a:noFill/>
+                  </a:tcPr>
+                </a:tc>
+                <a:tc>
+                  <a:txBody>
+                    <a:bodyPr/>
+                    <a:lstStyle/>
+                    <a:p>
+                      <a:r>
+                        <a:rPr sz="1900" b="0">
+                          <a:solidFill>
+                            <a:srgbClr val="111213"/>
+                          </a:solidFill>
+                          <a:latin typeface="Arial"/>
+                        </a:rPr>
+                        <a:t>0,217</a:t>
+                      </a:r>
+                    </a:p>
+                  </a:txBody>
+                  <a:tcPr marL="70000" marR="70000">
+                    <a:noFill/>
+                  </a:tcPr>
+                </a:tc>
+                <a:tc>
+                  <a:txBody>
+                    <a:bodyPr/>
+                    <a:lstStyle/>
+                    <a:p>
+                      <a:r>
+                        <a:rPr sz="1900" b="0">
+                          <a:solidFill>
+                            <a:srgbClr val="111213"/>
+                          </a:solidFill>
+                          <a:latin typeface="Arial"/>
+                        </a:rPr>
+                        <a:t>0,216</a:t>
+                      </a:r>
+                    </a:p>
+                  </a:txBody>
+                  <a:tcPr marL="70000" marR="70000">
+                    <a:noFill/>
+                  </a:tcPr>
+                </a:tc>
+                <a:tc>
+                  <a:txBody>
+                    <a:bodyPr/>
+                    <a:lstStyle/>
+                    <a:p>
+                      <a:r>
+                        <a:rPr sz="1900" b="0">
+                          <a:solidFill>
+                            <a:srgbClr val="111213"/>
+                          </a:solidFill>
+                          <a:latin typeface="Arial"/>
+                        </a:rPr>
+                        <a:t>10,9 %</a:t>
+                      </a:r>
+                    </a:p>
+                  </a:txBody>
+                  <a:tcPr marL="70000" marR="70000">
+                    <a:noFill/>
+                  </a:tcPr>
+                </a:tc>
+                <a:tc>
+                  <a:txBody>
+                    <a:bodyPr/>
+                    <a:lstStyle/>
+                    <a:p>
+                      <a:r>
+                        <a:rPr sz="1900" b="0">
+                          <a:solidFill>
+                            <a:srgbClr val="111213"/>
+                          </a:solidFill>
+                          <a:latin typeface="Arial"/>
+                        </a:rPr>
+                        <a:t>21 min</a:t>
+                      </a:r>
+                    </a:p>
+                  </a:txBody>
+                  <a:tcPr marL="70000" marR="70000">
+                    <a:noFill/>
+                  </a:tcPr>
+                </a:tc>
+              </a:tr>
+              <a:tr h="480000">
+                <a:tc>
+                  <a:txBody>
+                    <a:bodyPr/>
+                    <a:lstStyle/>
+                    <a:p>
+                      <a:r>
+                        <a:rPr sz="1900" b="1">
+                          <a:solidFill>
+                            <a:srgbClr val="56B4E9"/>
+                          </a:solidFill>
+                          <a:latin typeface="Arial"/>
+                        </a:rPr>
+                        <a:t>M2 TCN</a:t>
+                      </a:r>
+                    </a:p>
+                  </a:txBody>
+                  <a:tcPr marL="70000" marR="70000">
+                    <a:noFill/>
+                  </a:tcPr>
+                </a:tc>
+                <a:tc>
+                  <a:txBody>
+                    <a:bodyPr/>
+                    <a:lstStyle/>
+                    <a:p>
+                      <a:r>
+                        <a:rPr sz="1900" b="0">
+                          <a:solidFill>
+                            <a:srgbClr val="111213"/>
+                          </a:solidFill>
+                          <a:latin typeface="Arial"/>
+                        </a:rPr>
+                        <a:t>0,247</a:t>
+                      </a:r>
+                    </a:p>
+                  </a:txBody>
+                  <a:tcPr marL="70000" marR="70000">
+                    <a:noFill/>
+                  </a:tcPr>
+                </a:tc>
+                <a:tc>
+                  <a:txBody>
+                    <a:bodyPr/>
+                    <a:lstStyle/>
+                    <a:p>
+                      <a:r>
+                        <a:rPr sz="1900" b="0">
+                          <a:solidFill>
+                            <a:srgbClr val="111213"/>
+                          </a:solidFill>
+                          <a:latin typeface="Arial"/>
+                        </a:rPr>
+                        <a:t>0,247</a:t>
+                      </a:r>
+                    </a:p>
+                  </a:txBody>
+                  <a:tcPr marL="70000" marR="70000">
+                    <a:noFill/>
+                  </a:tcPr>
+                </a:tc>
+                <a:tc>
+                  <a:txBody>
+                    <a:bodyPr/>
+                    <a:lstStyle/>
+                    <a:p>
+                      <a:r>
+                        <a:rPr sz="1900" b="0">
+                          <a:solidFill>
+                            <a:srgbClr val="111213"/>
+                          </a:solidFill>
+                          <a:latin typeface="Arial"/>
+                        </a:rPr>
+                        <a:t>8,1 %</a:t>
+                      </a:r>
+                    </a:p>
+                  </a:txBody>
+                  <a:tcPr marL="70000" marR="70000">
+                    <a:noFill/>
+                  </a:tcPr>
+                </a:tc>
+                <a:tc>
+                  <a:txBody>
+                    <a:bodyPr/>
+                    <a:lstStyle/>
+                    <a:p>
+                      <a:r>
+                        <a:rPr sz="1900" b="0">
+                          <a:solidFill>
+                            <a:srgbClr val="111213"/>
+                          </a:solidFill>
+                          <a:latin typeface="Arial"/>
+                        </a:rPr>
+                        <a:t>11 min</a:t>
+                      </a:r>
+                    </a:p>
+                  </a:txBody>
+                  <a:tcPr marL="70000" marR="70000">
+                    <a:noFill/>
+                  </a:tcPr>
+                </a:tc>
+              </a:tr>
+              <a:tr h="480000">
+                <a:tc>
+                  <a:txBody>
+                    <a:bodyPr/>
+                    <a:lstStyle/>
+                    <a:p>
+                      <a:r>
+                        <a:rPr sz="1900" b="1">
+                          <a:solidFill>
+                            <a:srgbClr val="009E73"/>
+                          </a:solidFill>
+                          <a:latin typeface="Arial"/>
+                        </a:rPr>
+                        <a:t>M3 Transformer</a:t>
+                      </a:r>
+                    </a:p>
+                  </a:txBody>
+                  <a:tcPr marL="70000" marR="70000">
+                    <a:noFill/>
+                  </a:tcPr>
+                </a:tc>
+                <a:tc>
+                  <a:txBody>
+                    <a:bodyPr/>
+                    <a:lstStyle/>
+                    <a:p>
+                      <a:r>
+                        <a:rPr sz="1900" b="0">
+                          <a:solidFill>
+                            <a:srgbClr val="111213"/>
+                          </a:solidFill>
+                          <a:latin typeface="Arial"/>
+                        </a:rPr>
+                        <a:t>0,256</a:t>
+                      </a:r>
+                    </a:p>
+                  </a:txBody>
+                  <a:tcPr marL="70000" marR="70000">
+                    <a:noFill/>
+                  </a:tcPr>
+                </a:tc>
+                <a:tc>
+                  <a:txBody>
+                    <a:bodyPr/>
+                    <a:lstStyle/>
+                    <a:p>
+                      <a:r>
+                        <a:rPr sz="1900" b="0">
+                          <a:solidFill>
+                            <a:srgbClr val="111213"/>
+                          </a:solidFill>
+                          <a:latin typeface="Arial"/>
+                        </a:rPr>
+                        <a:t>0,257</a:t>
+                      </a:r>
+                    </a:p>
+                  </a:txBody>
+                  <a:tcPr marL="70000" marR="70000">
+                    <a:noFill/>
+                  </a:tcPr>
+                </a:tc>
+                <a:tc>
+                  <a:txBody>
+                    <a:bodyPr/>
+                    <a:lstStyle/>
+                    <a:p>
+                      <a:r>
+                        <a:rPr sz="1900" b="0">
+                          <a:solidFill>
+                            <a:srgbClr val="111213"/>
+                          </a:solidFill>
+                          <a:latin typeface="Arial"/>
+                        </a:rPr>
+                        <a:t>5,6 %</a:t>
+                      </a:r>
+                    </a:p>
+                  </a:txBody>
+                  <a:tcPr marL="70000" marR="70000">
+                    <a:noFill/>
+                  </a:tcPr>
+                </a:tc>
+                <a:tc>
+                  <a:txBody>
+                    <a:bodyPr/>
+                    <a:lstStyle/>
+                    <a:p>
+                      <a:r>
+                        <a:rPr sz="1900" b="0">
+                          <a:solidFill>
+                            <a:srgbClr val="111213"/>
+                          </a:solidFill>
+                          <a:latin typeface="Arial"/>
+                        </a:rPr>
+                        <a:t>24 min</a:t>
+                      </a:r>
+                    </a:p>
+                  </a:txBody>
+                  <a:tcPr marL="70000" marR="70000">
+                    <a:noFill/>
+                  </a:tcPr>
+                </a:tc>
+              </a:tr>
+            </a:tbl>
+          </a:graphicData>
+        </a:graphic>
+      </p:graphicFrame>
+      <p:sp>
+        <p:nvSpPr>
+          <p:cNvPr id="10" name="TextBox 9"/>
+          <p:cNvSpPr txBox="1"/>
+          <p:nvPr/>
+        </p:nvSpPr>
+        <p:spPr>
+          <a:xfrm>
+            <a:off x="609600" y="4100000"/>
+            <a:ext cx="10900000" cy="1800000"/>
+          </a:xfrm>
+          <a:prstGeom prst="rect">
+            <a:avLst/>
+          </a:prstGeom>
+          <a:noFill/>
+        </p:spPr>
+        <p:txBody>
+          <a:bodyPr wrap="square">
+            <a:spAutoFit/>
+          </a:bodyPr>
+          <a:lstStyle/>
+          <a:p>
+            <a:pPr>
+              <a:spcAft>
+                <a:spcPts val="1200"/>
+              </a:spcAft>
+            </a:pPr>
+            <a:r>
+              <a:rPr sz="2100" b="1">
+                <a:solidFill>
+                  <a:srgbClr val="E69F00"/>
+                </a:solidFill>
+                <a:latin typeface="Arial"/>
+              </a:rPr>
+              <a:t>M1 </a:t>
+            </a:r>
+            <a:r>
+              <a:rPr sz="2100" b="0">
+                <a:solidFill>
+                  <a:srgbClr val="111213"/>
+                </a:solidFill>
+                <a:latin typeface="Arial"/>
+              </a:rPr>
+              <a:t>acierta más.  </a:t>
+            </a:r>
+            <a:r>
+              <a:rPr sz="2100" b="1">
+                <a:solidFill>
+                  <a:srgbClr val="56B4E9"/>
+                </a:solidFill>
+                <a:latin typeface="Arial"/>
+              </a:rPr>
+              <a:t>M2 </a:t>
+            </a:r>
+            <a:r>
+              <a:rPr sz="2100" b="0">
+                <a:solidFill>
+                  <a:srgbClr val="111213"/>
+                </a:solidFill>
+                <a:latin typeface="Arial"/>
+              </a:rPr>
+              <a:t>es el más rápido.  </a:t>
+            </a:r>
+            <a:r>
+              <a:rPr sz="2100" b="1">
+                <a:solidFill>
+                  <a:srgbClr val="009E73"/>
+                </a:solidFill>
+                <a:latin typeface="Arial"/>
+              </a:rPr>
+              <a:t>M3 </a:t>
+            </a:r>
+            <a:r>
+              <a:rPr sz="2100" b="0">
+                <a:solidFill>
+                  <a:srgbClr val="111213"/>
+                </a:solidFill>
+                <a:latin typeface="Arial"/>
+              </a:rPr>
+              <a:t>necesitaba más épocas.</a:t>
+            </a:r>
+          </a:p>
+          <a:p>
+            <a:pPr>
+              <a:spcAft>
+                <a:spcPts val="1200"/>
+              </a:spcAft>
+            </a:pPr>
+            <a:r>
+              <a:rPr sz="2100" b="0">
+                <a:solidFill>
+                  <a:srgbClr val="111213"/>
+                </a:solidFill>
+                <a:latin typeface="Arial"/>
+              </a:rPr>
+              <a:t>Menor es mejor en distancia de edición y CER.</a:t>
+            </a:r>
+          </a:p>
+        </p:txBody>
+      </p:sp>
+    </p:spTree>
+  </p:cSld>
+  <p:clrMapOvr>
+    <a:masterClrMapping/>
+  </p:clrMapOvr>
+</p:sld>
+</file>
+
+<file path=ppt/slides/slide16.xml><?xml version="1.0" encoding="utf-8"?>
+<p:sld xmlns:a="http://schemas.openxmlformats.org/drawingml/2006/main" xmlns:p="http://schemas.openxmlformats.org/presentationml/2006/main" xmlns:r="http://schemas.openxmlformats.org/officeDocument/2006/relationships">
+  <p:cSld>
+    <p:bg>
+      <p:bgPr>
+        <a:solidFill>
+          <a:srgbClr val="EEEFEC"/>
+        </a:solidFill>
+      </p:bgPr>
+    </p:bg>
+    <p:spTree>
+      <p:nvGrpSpPr>
+        <p:cNvPr id="1" name=""/>
+        <p:cNvGrpSpPr/>
+        <p:nvPr/>
+      </p:nvGrpSpPr>
+      <p:grpSpPr/>
+      <p:sp>
+        <p:nvSpPr>
+          <p:cNvPr id="8" name="">
+            <a:extLst>
+              <a:ext uri="{FF2B5EF4-FFF2-40B4-BE49-F238E27FC236}">
+                <a16:creationId xmlns:a16="http://schemas.microsoft.com/office/drawing/2014/main" id="{5F0C0C5B-88A8-4B4D-9EDB-48822A8DAFA3}"/>
+              </a:ext>
+            </a:extLst>
+          </p:cNvPr>
+          <p:cNvSpPr>
+            <a:spLocks noGrp="1"/>
+          </p:cNvSpPr>
+          <p:nvPr/>
+        </p:nvSpPr>
+        <p:spPr>
+          <a:xfrm>
+            <a:off x="609600" y="495300"/>
+            <a:ext cx="10972800" cy="857250"/>
+          </a:xfrm>
+          <a:prstGeom prst="rect">
+            <a:avLst/>
+          </a:prstGeom>
+          <a:noFill/>
+          <a:ln w="0">
+            <a:noFill/>
+          </a:ln>
+        </p:spPr>
+        <p:txBody>
+          <a:bodyPr/>
+          <a:lstStyle>
+            <a:defPPr>
+              <a:defRPr sz="3450" b="1">
+                <a:solidFill>
+                  <a:srgbClr val="111213"/>
+                </a:solidFill>
+                <a:latin typeface="Arial"/>
+                <a:ea typeface="Arial"/>
+                <a:cs typeface="Arial"/>
+              </a:defRPr>
+            </a:defPPr>
+          </a:lstStyle>
+          <a:p>
+            <a:pPr>
+              <a:defRPr sz="3450" b="1">
+                <a:solidFill>
+                  <a:srgbClr val="111213"/>
+                </a:solidFill>
+                <a:latin typeface="Arial"/>
+                <a:ea typeface="Arial"/>
+                <a:cs typeface="Arial"/>
+              </a:defRPr>
+            </a:pPr>
+            <a:r>
+              <a:rPr sz="3450" b="1">
+                <a:solidFill>
+                  <a:srgbClr val="111213"/>
+                </a:solidFill>
+                <a:latin typeface="Arial"/>
+                <a:ea typeface="Arial"/>
+                <a:cs typeface="Arial"/>
+              </a:rPr>
+              <a:t>Conclusiones</a:t>
+            </a:r>
+          </a:p>
+        </p:txBody>
+      </p:sp>
+      <p:sp>
+        <p:nvSpPr>
+          <p:cNvPr id="2" name="">
+            <a:extLst>
+              <a:ext uri="{FF2B5EF4-FFF2-40B4-BE49-F238E27FC236}">
+                <a16:creationId xmlns:a16="http://schemas.microsoft.com/office/drawing/2014/main" id="{6CF16C09-F0DD-4B18-A8E9-4739423997C0}"/>
+              </a:ext>
+            </a:extLst>
+          </p:cNvPr>
+          <p:cNvSpPr>
+            <a:spLocks noGrp="1"/>
+          </p:cNvSpPr>
+          <p:nvPr/>
+        </p:nvSpPr>
+        <p:spPr>
+          <a:xfrm>
+            <a:off x="609600" y="6438900"/>
+            <a:ext cx="9715500" cy="228600"/>
+          </a:xfrm>
+          <a:prstGeom prst="rect">
+            <a:avLst/>
+          </a:prstGeom>
+          <a:noFill/>
+          <a:ln w="0">
+            <a:noFill/>
+          </a:ln>
+        </p:spPr>
+        <p:txBody>
+          <a:bodyPr/>
+          <a:lstStyle>
+            <a:defPPr>
+              <a:defRPr sz="1200" b="0">
+                <a:solidFill>
+                  <a:srgbClr val="55585C"/>
+                </a:solidFill>
+                <a:latin typeface="Arial"/>
+                <a:ea typeface="Arial"/>
+                <a:cs typeface="Arial"/>
+              </a:defRPr>
+            </a:defPPr>
+          </a:lstStyle>
+          <a:p>
+            <a:pPr>
+              <a:defRPr sz="1200" b="0">
+                <a:solidFill>
+                  <a:srgbClr val="55585C"/>
+                </a:solidFill>
+                <a:latin typeface="Arial"/>
+                <a:ea typeface="Arial"/>
+                <a:cs typeface="Arial"/>
+              </a:defRPr>
+            </a:pPr>
+            <a:r>
+              <a:rPr sz="1200" b="0">
+                <a:solidFill>
+                  <a:srgbClr val="55585C"/>
+                </a:solidFill>
+                <a:latin typeface="Arial"/>
+                <a:ea typeface="Arial"/>
+                <a:cs typeface="Arial"/>
+              </a:rPr>
+              <a:t>CC3084 · Reconocimiento de deletreo manual de ASL</a:t>
+            </a:r>
+          </a:p>
+        </p:txBody>
+      </p:sp>
+      <p:sp>
+        <p:nvSpPr>
+          <p:cNvPr id="3" name="">
+            <a:extLst>
+              <a:ext uri="{FF2B5EF4-FFF2-40B4-BE49-F238E27FC236}">
+                <a16:creationId xmlns:a16="http://schemas.microsoft.com/office/drawing/2014/main" id="{FE3440C3-482F-43B1-B2A2-F07301C84FD6}"/>
+              </a:ext>
+            </a:extLst>
+          </p:cNvPr>
+          <p:cNvSpPr>
+            <a:spLocks noGrp="1"/>
+          </p:cNvSpPr>
+          <p:nvPr/>
+        </p:nvSpPr>
+        <p:spPr>
+          <a:xfrm>
+            <a:off x="11144250" y="6438900"/>
+            <a:ext cx="476250" cy="228600"/>
+          </a:xfrm>
+          <a:prstGeom prst="rect">
+            <a:avLst/>
+          </a:prstGeom>
+          <a:noFill/>
+          <a:ln w="0">
+            <a:noFill/>
+          </a:ln>
+        </p:spPr>
+        <p:txBody>
+          <a:bodyPr/>
+          <a:lstStyle>
+            <a:defPPr>
+              <a:defRPr sz="1200" b="0">
+                <a:solidFill>
+                  <a:srgbClr val="55585C"/>
+                </a:solidFill>
+                <a:latin typeface="Arial"/>
+                <a:ea typeface="Arial"/>
+                <a:cs typeface="Arial"/>
+              </a:defRPr>
+            </a:defPPr>
+          </a:lstStyle>
+          <a:p>
+            <a:pPr>
+              <a:defRPr sz="1200" b="0">
+                <a:solidFill>
+                  <a:srgbClr val="55585C"/>
+                </a:solidFill>
+                <a:latin typeface="Arial"/>
+                <a:ea typeface="Arial"/>
+                <a:cs typeface="Arial"/>
+              </a:defRPr>
+            </a:pPr>
+            <a:r>
+              <a:rPr sz="1200" b="0">
+                <a:solidFill>
+                  <a:srgbClr val="55585C"/>
+                </a:solidFill>
+                <a:latin typeface="Arial"/>
+                <a:ea typeface="Arial"/>
+                <a:cs typeface="Arial"/>
+              </a:rPr>
+              <a:t>11</a:t>
+            </a:r>
+          </a:p>
+        </p:txBody>
+      </p:sp>
+      <p:sp>
+        <p:nvSpPr>
+          <p:cNvPr id="9" name="TextBox 8"/>
+          <p:cNvSpPr txBox="1"/>
+          <p:nvPr/>
+        </p:nvSpPr>
+        <p:spPr>
+          <a:xfrm>
+            <a:off x="609600" y="1600000"/>
+            <a:ext cx="10900000" cy="4600000"/>
+          </a:xfrm>
+          <a:prstGeom prst="rect">
+            <a:avLst/>
+          </a:prstGeom>
+          <a:noFill/>
+        </p:spPr>
+        <p:txBody>
+          <a:bodyPr wrap="square">
+            <a:spAutoFit/>
+          </a:bodyPr>
+          <a:lstStyle/>
+          <a:p>
+            <a:pPr>
+              <a:spcAft>
+                <a:spcPts val="1200"/>
+              </a:spcAft>
+            </a:pPr>
+            <a:r>
+              <a:rPr sz="2100" b="0">
+                <a:solidFill>
+                  <a:srgbClr val="111213"/>
+                </a:solidFill>
+                <a:latin typeface="Arial"/>
+              </a:rPr>
+              <a:t>CTC funciona: se entrena sin saber dónde empieza cada letra.</a:t>
+            </a:r>
+          </a:p>
+          <a:p>
+            <a:pPr>
+              <a:spcAft>
+                <a:spcPts val="1200"/>
+              </a:spcAft>
+            </a:pPr>
+            <a:r>
+              <a:rPr sz="2100" b="0">
+                <a:solidFill>
+                  <a:srgbClr val="111213"/>
+                </a:solidFill>
+                <a:latin typeface="Arial"/>
+              </a:rPr>
+              <a:t>M1 BiGRU es el mejor y el que recomendamos para la app.</a:t>
+            </a:r>
+          </a:p>
+          <a:p>
+            <a:pPr>
+              <a:spcAft>
+                <a:spcPts val="1200"/>
+              </a:spcAft>
+            </a:pPr>
+            <a:r>
+              <a:rPr sz="2100" b="0">
+                <a:solidFill>
+                  <a:srgbClr val="111213"/>
+                </a:solidFill>
+                <a:latin typeface="Arial"/>
+              </a:rPr>
+              <a:t>M2 TCN da casi lo mismo con la mitad del tiempo.</a:t>
+            </a:r>
+          </a:p>
+          <a:p>
+            <a:pPr>
+              <a:spcAft>
+                <a:spcPts val="1200"/>
+              </a:spcAft>
+            </a:pPr>
+            <a:r>
+              <a:rPr sz="2100" b="0">
+                <a:solidFill>
+                  <a:srgbClr val="111213"/>
+                </a:solidFill>
+                <a:latin typeface="Arial"/>
+              </a:rPr>
+              <a:t>El error más grande está en los espacios, no en las letras raras.</a:t>
+            </a:r>
+          </a:p>
+          <a:p>
+            <a:pPr>
+              <a:spcAft>
+                <a:spcPts val="1200"/>
+              </a:spcAft>
+            </a:pPr>
+            <a:r>
+              <a:rPr sz="2100" b="0">
+                <a:solidFill>
+                  <a:srgbClr val="111213"/>
+                </a:solidFill>
+                <a:latin typeface="Arial"/>
+              </a:rPr>
+              <a:t>Separar por persona dio una evaluación honesta: gente que el modelo nunca vio.</a:t>
+            </a:r>
+          </a:p>
+          <a:p>
+            <a:pPr>
+              <a:spcAft>
+                <a:spcPts val="1200"/>
+              </a:spcAft>
+            </a:pPr>
+            <a:r>
+              <a:rPr sz="2100" b="0">
+                <a:solidFill>
+                  <a:srgbClr val="111213"/>
+                </a:solidFill>
+                <a:latin typeface="Arial"/>
+              </a:rPr>
+              <a:t>Hoy falla 1 de cada 5 caracteres: falta aumento de datos y un modelo de lenguaje.</a:t>
+            </a:r>
+          </a:p>
+        </p:txBody>
+      </p:sp>
+    </p:spTree>
+  </p:cSld>
+  <p:clrMapOvr>
+    <a:masterClrMapping/>
+  </p:clrMapOvr>
 </p:sld>
 </file>
 
@@ -6252,7 +8941,7 @@
                 <a:ea typeface="Arial"/>
                 <a:cs typeface="Arial"/>
               </a:rPr>
-              <a:t>03</a:t>
+              <a:t>04</a:t>
             </a:r>
           </a:p>
         </p:txBody>
@@ -6471,7 +9160,7 @@
         </p:nvSpPr>
         <p:spPr>
           <a:xfrm xmlns:a="http://schemas.openxmlformats.org/drawingml/2006/main">
-            <a:off x="609600" y="5314950"/>
+            <a:off x="609600" y="4514950"/>
             <a:ext cx="10763250" cy="666750"/>
           </a:xfrm>
           <a:prstGeom xmlns:a="http://schemas.openxmlformats.org/drawingml/2006/main" prst="rect">
@@ -6517,6 +9206,61 @@
                 <a:cs typeface="Arial"/>
               </a:rPr>
               <a:t>80 características por frame</a:t>
+            </a:r>
+          </a:p>
+        </p:txBody>
+      </p:sp>
+      <p:sp xmlns:a="http://schemas.openxmlformats.org/drawingml/2006/main">
+        <p:nvSpPr>
+          <p:cNvPr id="9" name="TextBox 8"/>
+          <p:cNvSpPr txBox="1"/>
+          <p:nvPr/>
+        </p:nvSpPr>
+        <p:spPr>
+          <a:xfrm>
+            <a:off x="609600" y="5131700"/>
+            <a:ext cx="10900000" cy="900000"/>
+          </a:xfrm>
+          <a:prstGeom prst="rect">
+            <a:avLst/>
+          </a:prstGeom>
+          <a:noFill/>
+        </p:spPr>
+        <p:txBody>
+          <a:bodyPr wrap="square">
+            <a:spAutoFit/>
+          </a:bodyPr>
+          <a:lstStyle/>
+          <a:p>
+            <a:pPr>
+              <a:spcAft>
+                <a:spcPts val="400"/>
+              </a:spcAft>
+            </a:pPr>
+            <a:r>
+              <a:rPr sz="1700" b="0">
+                <a:solidFill>
+                  <a:srgbClr val="55585C"/>
+                </a:solidFill>
+                <a:latin typeface="Arial"/>
+              </a:rPr>
+              <a:t>63 de la mano activa · 2 de la muñeca · 14 de pose · 1 de la otra mano.</a:t>
+            </a:r>
+          </a:p>
+          <a:p>
+            <a:pPr>
+              <a:spcAft>
+                <a:spcPts val="400"/>
+              </a:spcAft>
+            </a:pPr>
+            <a:r>
+              <a:rPr sz="1700" b="0">
+                <a:solidFill>
+                  <a:srgbClr val="55585C"/>
+                </a:solidFill>
+                <a:latin typeface="Arial"/>
+              </a:rPr>
+              <a:t>Sin la cara: el deletreo está en la mano. Normalizar quita la posición y el tamaño de cada persona.</a:t>
             </a:r>
           </a:p>
         </p:txBody>
@@ -6743,7 +9487,7 @@
                 <a:ea typeface="Arial"/>
                 <a:cs typeface="Arial"/>
               </a:rPr>
-              <a:t>04</a:t>
+              <a:t>05</a:t>
             </a:r>
           </a:p>
         </p:txBody>
@@ -6831,7 +9575,7 @@
                 <a:ea typeface="Arial"/>
                 <a:cs typeface="Arial"/>
               </a:rPr>
-              <a:t>67,208 frases</a:t>
+              <a:t>67 208 frases</a:t>
             </a:r>
           </a:p>
           <a:p xmlns:a="http://schemas.openxmlformats.org/drawingml/2006/main">
@@ -7147,7 +9891,7 @@
                 <a:ea typeface="Arial"/>
                 <a:cs typeface="Arial"/>
               </a:rPr>
-              <a:t>05</a:t>
+              <a:t>06</a:t>
             </a:r>
           </a:p>
         </p:txBody>
@@ -7661,7 +10405,7 @@
                 <a:ea typeface="Arial"/>
                 <a:cs typeface="Arial"/>
               </a:rPr>
-              <a:t>06</a:t>
+              <a:t>08</a:t>
             </a:r>
           </a:p>
         </p:txBody>
@@ -8264,7 +11008,7 @@
                 <a:ea typeface="Arial"/>
                 <a:cs typeface="Arial"/>
               </a:rPr>
-              <a:t>07</a:t>
+              <a:t>10</a:t>
             </a:r>
           </a:p>
         </p:txBody>
@@ -8579,7 +11323,7 @@
                 <a:ea typeface="Arial"/>
                 <a:cs typeface="Arial"/>
               </a:rPr>
-              <a:t>08</a:t>
+              <a:t>12</a:t>
             </a:r>
           </a:p>
         </p:txBody>
@@ -8928,7 +11672,7 @@
                 <a:ea typeface="Arial"/>
                 <a:cs typeface="Arial"/>
               </a:rPr>
-              <a:t>09</a:t>
+              <a:t>13</a:t>
             </a:r>
           </a:p>
         </p:txBody>
